--- a/docs/ProgramPlan.pptx.pptx
+++ b/docs/ProgramPlan.pptx.pptx
@@ -9,10 +9,11 @@
     <p:sldId id="267" r:id="rId3"/>
     <p:sldId id="271" r:id="rId4"/>
     <p:sldId id="274" r:id="rId5"/>
-    <p:sldId id="272" r:id="rId6"/>
-    <p:sldId id="273" r:id="rId7"/>
-    <p:sldId id="275" r:id="rId8"/>
-    <p:sldId id="276" r:id="rId9"/>
+    <p:sldId id="278" r:id="rId6"/>
+    <p:sldId id="272" r:id="rId7"/>
+    <p:sldId id="273" r:id="rId8"/>
+    <p:sldId id="275" r:id="rId9"/>
+    <p:sldId id="276" r:id="rId10"/>
   </p:sldIdLst>
   <p:sldSz cx="12192000" cy="6858000"/>
   <p:notesSz cx="6858000" cy="9144000"/>
@@ -273,7 +274,7 @@
                 </a:solidFill>
               </a:rPr>
               <a:pPr/>
-              <a:t>2024-01-14</a:t>
+              <a:t>2024-01-16</a:t>
             </a:fld>
             <a:endParaRPr lang="ko-KR" altLang="en-US" dirty="0">
               <a:solidFill>
@@ -503,7 +504,7 @@
                 </a:solidFill>
               </a:rPr>
               <a:pPr/>
-              <a:t>2024-01-14</a:t>
+              <a:t>2024-01-16</a:t>
             </a:fld>
             <a:endParaRPr lang="ko-KR" altLang="en-US" dirty="0">
               <a:solidFill>
@@ -743,7 +744,7 @@
                 </a:solidFill>
               </a:rPr>
               <a:pPr/>
-              <a:t>2024-01-14</a:t>
+              <a:t>2024-01-16</a:t>
             </a:fld>
             <a:endParaRPr lang="ko-KR" altLang="en-US" dirty="0">
               <a:solidFill>
@@ -973,7 +974,7 @@
                 </a:solidFill>
               </a:rPr>
               <a:pPr/>
-              <a:t>2024-01-14</a:t>
+              <a:t>2024-01-16</a:t>
             </a:fld>
             <a:endParaRPr lang="ko-KR" altLang="en-US" dirty="0">
               <a:solidFill>
@@ -1280,7 +1281,7 @@
                 </a:solidFill>
               </a:rPr>
               <a:pPr/>
-              <a:t>2024-01-14</a:t>
+              <a:t>2024-01-16</a:t>
             </a:fld>
             <a:endParaRPr lang="ko-KR" altLang="en-US" dirty="0">
               <a:solidFill>
@@ -1577,7 +1578,7 @@
                 </a:solidFill>
               </a:rPr>
               <a:pPr/>
-              <a:t>2024-01-14</a:t>
+              <a:t>2024-01-16</a:t>
             </a:fld>
             <a:endParaRPr lang="ko-KR" altLang="en-US" dirty="0">
               <a:solidFill>
@@ -2021,7 +2022,7 @@
                 </a:solidFill>
               </a:rPr>
               <a:pPr/>
-              <a:t>2024-01-14</a:t>
+              <a:t>2024-01-16</a:t>
             </a:fld>
             <a:endParaRPr lang="ko-KR" altLang="en-US" dirty="0">
               <a:solidFill>
@@ -2194,7 +2195,7 @@
                 </a:solidFill>
               </a:rPr>
               <a:pPr/>
-              <a:t>2024-01-14</a:t>
+              <a:t>2024-01-16</a:t>
             </a:fld>
             <a:endParaRPr lang="ko-KR" altLang="en-US" dirty="0">
               <a:solidFill>
@@ -2339,7 +2340,7 @@
                 </a:solidFill>
               </a:rPr>
               <a:pPr/>
-              <a:t>2024-01-14</a:t>
+              <a:t>2024-01-16</a:t>
             </a:fld>
             <a:endParaRPr lang="ko-KR" altLang="en-US" dirty="0">
               <a:solidFill>
@@ -2682,7 +2683,7 @@
                 </a:solidFill>
               </a:rPr>
               <a:pPr/>
-              <a:t>2024-01-14</a:t>
+              <a:t>2024-01-16</a:t>
             </a:fld>
             <a:endParaRPr lang="ko-KR" altLang="en-US" dirty="0">
               <a:solidFill>
@@ -3002,7 +3003,7 @@
                 </a:solidFill>
               </a:rPr>
               <a:pPr/>
-              <a:t>2024-01-14</a:t>
+              <a:t>2024-01-16</a:t>
             </a:fld>
             <a:endParaRPr lang="ko-KR" altLang="en-US" dirty="0">
               <a:solidFill>
@@ -3275,7 +3276,7 @@
                 </a:solidFill>
               </a:rPr>
               <a:pPr/>
-              <a:t>2024-01-14</a:t>
+              <a:t>2024-01-16</a:t>
             </a:fld>
             <a:endParaRPr lang="ko-KR" altLang="en-US" dirty="0">
               <a:solidFill>
@@ -8062,6 +8063,1299 @@
         </p:nvSpPr>
         <p:spPr>
           <a:xfrm>
+            <a:off x="575582" y="823060"/>
+            <a:ext cx="11348267" cy="5731328"/>
+          </a:xfrm>
+          <a:prstGeom prst="rect">
+            <a:avLst/>
+          </a:prstGeom>
+          <a:solidFill>
+            <a:schemeClr val="bg1">
+              <a:lumMod val="85000"/>
+            </a:schemeClr>
+          </a:solidFill>
+        </p:spPr>
+        <p:style>
+          <a:lnRef idx="2">
+            <a:schemeClr val="accent1">
+              <a:shade val="15000"/>
+            </a:schemeClr>
+          </a:lnRef>
+          <a:fillRef idx="1">
+            <a:schemeClr val="accent1"/>
+          </a:fillRef>
+          <a:effectRef idx="0">
+            <a:schemeClr val="accent1"/>
+          </a:effectRef>
+          <a:fontRef idx="minor">
+            <a:schemeClr val="lt1"/>
+          </a:fontRef>
+        </p:style>
+        <p:txBody>
+          <a:bodyPr rtlCol="0" anchor="ctr"/>
+          <a:lstStyle/>
+          <a:p>
+            <a:pPr algn="ctr"/>
+            <a:endParaRPr lang="ko-KR" altLang="en-US"/>
+          </a:p>
+        </p:txBody>
+      </p:sp>
+      <p:sp>
+        <p:nvSpPr>
+          <p:cNvPr id="2" name="사각형: 둥근 모서리 26">
+            <a:extLst>
+              <a:ext uri="{FF2B5EF4-FFF2-40B4-BE49-F238E27FC236}">
+                <a16:creationId xmlns:a16="http://schemas.microsoft.com/office/drawing/2014/main" id="{D2542C75-A310-E3CF-4DE1-FE5C6DBA9A9F}"/>
+              </a:ext>
+            </a:extLst>
+          </p:cNvPr>
+          <p:cNvSpPr/>
+          <p:nvPr/>
+        </p:nvSpPr>
+        <p:spPr>
+          <a:xfrm>
+            <a:off x="9466399" y="99445"/>
+            <a:ext cx="2457450" cy="521040"/>
+          </a:xfrm>
+          <a:prstGeom prst="roundRect">
+            <a:avLst>
+              <a:gd name="adj" fmla="val 50000"/>
+            </a:avLst>
+          </a:prstGeom>
+          <a:solidFill>
+            <a:schemeClr val="tx2">
+              <a:lumMod val="60000"/>
+              <a:lumOff val="40000"/>
+            </a:schemeClr>
+          </a:solidFill>
+          <a:ln>
+            <a:noFill/>
+          </a:ln>
+          <a:effectLst>
+            <a:outerShdw blurRad="63500" sx="102000" sy="102000" algn="ctr" rotWithShape="0">
+              <a:prstClr val="black">
+                <a:alpha val="5000"/>
+              </a:prstClr>
+            </a:outerShdw>
+          </a:effectLst>
+        </p:spPr>
+        <p:style>
+          <a:lnRef idx="2">
+            <a:schemeClr val="accent1">
+              <a:shade val="50000"/>
+            </a:schemeClr>
+          </a:lnRef>
+          <a:fillRef idx="1">
+            <a:schemeClr val="accent1"/>
+          </a:fillRef>
+          <a:effectRef idx="0">
+            <a:schemeClr val="accent1"/>
+          </a:effectRef>
+          <a:fontRef idx="minor">
+            <a:schemeClr val="lt1"/>
+          </a:fontRef>
+        </p:style>
+        <p:txBody>
+          <a:bodyPr wrap="none" rtlCol="0" anchor="ctr"/>
+          <a:lstStyle/>
+          <a:p>
+            <a:pPr algn="ctr"/>
+            <a:r>
+              <a:rPr lang="en-US" altLang="ko-KR" sz="1200" b="1" dirty="0">
+                <a:solidFill>
+                  <a:prstClr val="white"/>
+                </a:solidFill>
+              </a:rPr>
+              <a:t>1.</a:t>
+            </a:r>
+            <a:r>
+              <a:rPr lang="ko-KR" altLang="en-US" sz="1200" b="1" dirty="0">
+                <a:solidFill>
+                  <a:prstClr val="white"/>
+                </a:solidFill>
+              </a:rPr>
+              <a:t>전체 화면</a:t>
+            </a:r>
+          </a:p>
+        </p:txBody>
+      </p:sp>
+      <p:sp>
+        <p:nvSpPr>
+          <p:cNvPr id="4" name="모서리가 둥근 직사각형 4">
+            <a:extLst>
+              <a:ext uri="{FF2B5EF4-FFF2-40B4-BE49-F238E27FC236}">
+                <a16:creationId xmlns:a16="http://schemas.microsoft.com/office/drawing/2014/main" id="{40A7AAE0-858E-D837-9A70-207886924837}"/>
+              </a:ext>
+            </a:extLst>
+          </p:cNvPr>
+          <p:cNvSpPr/>
+          <p:nvPr/>
+        </p:nvSpPr>
+        <p:spPr>
+          <a:xfrm>
+            <a:off x="775196" y="1619041"/>
+            <a:ext cx="3840960" cy="4602145"/>
+          </a:xfrm>
+          <a:prstGeom prst="rect">
+            <a:avLst/>
+          </a:prstGeom>
+          <a:solidFill>
+            <a:schemeClr val="tx1">
+              <a:alpha val="18000"/>
+            </a:schemeClr>
+          </a:solidFill>
+          <a:ln>
+            <a:noFill/>
+          </a:ln>
+          <a:effectLst>
+            <a:outerShdw blurRad="228600" dist="38100" dir="5400000" algn="t" rotWithShape="0">
+              <a:prstClr val="black">
+                <a:alpha val="40000"/>
+              </a:prstClr>
+            </a:outerShdw>
+          </a:effectLst>
+        </p:spPr>
+        <p:style>
+          <a:lnRef idx="2">
+            <a:schemeClr val="accent1">
+              <a:shade val="50000"/>
+            </a:schemeClr>
+          </a:lnRef>
+          <a:fillRef idx="1">
+            <a:schemeClr val="accent1"/>
+          </a:fillRef>
+          <a:effectRef idx="0">
+            <a:schemeClr val="accent1"/>
+          </a:effectRef>
+          <a:fontRef idx="minor">
+            <a:schemeClr val="lt1"/>
+          </a:fontRef>
+        </p:style>
+        <p:txBody>
+          <a:bodyPr rtlCol="0" anchor="ctr"/>
+          <a:lstStyle/>
+          <a:p>
+            <a:pPr algn="ctr"/>
+            <a:endParaRPr lang="ko-KR" altLang="en-US" dirty="0">
+              <a:solidFill>
+                <a:prstClr val="white"/>
+              </a:solidFill>
+            </a:endParaRPr>
+          </a:p>
+        </p:txBody>
+      </p:sp>
+      <p:grpSp>
+        <p:nvGrpSpPr>
+          <p:cNvPr id="70" name="그룹 69">
+            <a:extLst>
+              <a:ext uri="{FF2B5EF4-FFF2-40B4-BE49-F238E27FC236}">
+                <a16:creationId xmlns:a16="http://schemas.microsoft.com/office/drawing/2014/main" id="{0EB63F53-B4C9-3211-E51A-F2C48E3933B4}"/>
+              </a:ext>
+            </a:extLst>
+          </p:cNvPr>
+          <p:cNvGrpSpPr/>
+          <p:nvPr/>
+        </p:nvGrpSpPr>
+        <p:grpSpPr>
+          <a:xfrm>
+            <a:off x="4278607" y="1620438"/>
+            <a:ext cx="337549" cy="373271"/>
+            <a:chOff x="829310" y="702129"/>
+            <a:chExt cx="828040" cy="791936"/>
+          </a:xfrm>
+        </p:grpSpPr>
+        <p:sp>
+          <p:nvSpPr>
+            <p:cNvPr id="71" name="모서리가 둥근 직사각형 4">
+              <a:extLst>
+                <a:ext uri="{FF2B5EF4-FFF2-40B4-BE49-F238E27FC236}">
+                  <a16:creationId xmlns:a16="http://schemas.microsoft.com/office/drawing/2014/main" id="{8F60EC01-71DF-49CD-6CA4-00A9C1E08F7B}"/>
+                </a:ext>
+              </a:extLst>
+            </p:cNvPr>
+            <p:cNvSpPr/>
+            <p:nvPr/>
+          </p:nvSpPr>
+          <p:spPr>
+            <a:xfrm>
+              <a:off x="840921" y="702129"/>
+              <a:ext cx="816429" cy="791936"/>
+            </a:xfrm>
+            <a:prstGeom prst="rect">
+              <a:avLst/>
+            </a:prstGeom>
+            <a:ln/>
+          </p:spPr>
+          <p:style>
+            <a:lnRef idx="2">
+              <a:schemeClr val="accent2"/>
+            </a:lnRef>
+            <a:fillRef idx="1">
+              <a:schemeClr val="lt1"/>
+            </a:fillRef>
+            <a:effectRef idx="0">
+              <a:schemeClr val="accent2"/>
+            </a:effectRef>
+            <a:fontRef idx="minor">
+              <a:schemeClr val="dk1"/>
+            </a:fontRef>
+          </p:style>
+          <p:txBody>
+            <a:bodyPr rtlCol="0" anchor="ctr"/>
+            <a:lstStyle/>
+            <a:p>
+              <a:pPr algn="ctr"/>
+              <a:endParaRPr lang="ko-KR" altLang="en-US">
+                <a:solidFill>
+                  <a:prstClr val="white"/>
+                </a:solidFill>
+              </a:endParaRPr>
+            </a:p>
+          </p:txBody>
+        </p:sp>
+        <p:cxnSp>
+          <p:nvCxnSpPr>
+            <p:cNvPr id="72" name="직선 연결선 71">
+              <a:extLst>
+                <a:ext uri="{FF2B5EF4-FFF2-40B4-BE49-F238E27FC236}">
+                  <a16:creationId xmlns:a16="http://schemas.microsoft.com/office/drawing/2014/main" id="{61D0EFB3-D6D8-A4B4-AE53-0E89CFD800A4}"/>
+                </a:ext>
+              </a:extLst>
+            </p:cNvPr>
+            <p:cNvCxnSpPr/>
+            <p:nvPr/>
+          </p:nvCxnSpPr>
+          <p:spPr>
+            <a:xfrm flipV="1">
+              <a:off x="829310" y="732470"/>
+              <a:ext cx="828040" cy="761595"/>
+            </a:xfrm>
+            <a:prstGeom prst="line">
+              <a:avLst/>
+            </a:prstGeom>
+          </p:spPr>
+          <p:style>
+            <a:lnRef idx="2">
+              <a:schemeClr val="accent2"/>
+            </a:lnRef>
+            <a:fillRef idx="1">
+              <a:schemeClr val="lt1"/>
+            </a:fillRef>
+            <a:effectRef idx="0">
+              <a:schemeClr val="accent2"/>
+            </a:effectRef>
+            <a:fontRef idx="minor">
+              <a:schemeClr val="dk1"/>
+            </a:fontRef>
+          </p:style>
+        </p:cxnSp>
+        <p:cxnSp>
+          <p:nvCxnSpPr>
+            <p:cNvPr id="73" name="직선 연결선 72">
+              <a:extLst>
+                <a:ext uri="{FF2B5EF4-FFF2-40B4-BE49-F238E27FC236}">
+                  <a16:creationId xmlns:a16="http://schemas.microsoft.com/office/drawing/2014/main" id="{DF4C3B2F-9C1D-36AB-DE80-902C076C4AD6}"/>
+                </a:ext>
+              </a:extLst>
+            </p:cNvPr>
+            <p:cNvCxnSpPr/>
+            <p:nvPr/>
+          </p:nvCxnSpPr>
+          <p:spPr>
+            <a:xfrm>
+              <a:off x="829310" y="702129"/>
+              <a:ext cx="828040" cy="788973"/>
+            </a:xfrm>
+            <a:prstGeom prst="line">
+              <a:avLst/>
+            </a:prstGeom>
+          </p:spPr>
+          <p:style>
+            <a:lnRef idx="2">
+              <a:schemeClr val="accent2"/>
+            </a:lnRef>
+            <a:fillRef idx="1">
+              <a:schemeClr val="lt1"/>
+            </a:fillRef>
+            <a:effectRef idx="0">
+              <a:schemeClr val="accent2"/>
+            </a:effectRef>
+            <a:fontRef idx="minor">
+              <a:schemeClr val="dk1"/>
+            </a:fontRef>
+          </p:style>
+        </p:cxnSp>
+      </p:grpSp>
+      <p:sp>
+        <p:nvSpPr>
+          <p:cNvPr id="5" name="모서리가 둥근 직사각형 4">
+            <a:extLst>
+              <a:ext uri="{FF2B5EF4-FFF2-40B4-BE49-F238E27FC236}">
+                <a16:creationId xmlns:a16="http://schemas.microsoft.com/office/drawing/2014/main" id="{D1A7605B-342A-02D1-2FB5-4827A7D3A256}"/>
+              </a:ext>
+            </a:extLst>
+          </p:cNvPr>
+          <p:cNvSpPr/>
+          <p:nvPr/>
+        </p:nvSpPr>
+        <p:spPr>
+          <a:xfrm>
+            <a:off x="775196" y="2006612"/>
+            <a:ext cx="3840960" cy="4214573"/>
+          </a:xfrm>
+          <a:prstGeom prst="rect">
+            <a:avLst/>
+          </a:prstGeom>
+          <a:solidFill>
+            <a:schemeClr val="tx1">
+              <a:alpha val="18000"/>
+            </a:schemeClr>
+          </a:solidFill>
+          <a:ln>
+            <a:noFill/>
+          </a:ln>
+          <a:effectLst>
+            <a:outerShdw blurRad="228600" dist="38100" dir="5400000" algn="t" rotWithShape="0">
+              <a:prstClr val="black">
+                <a:alpha val="40000"/>
+              </a:prstClr>
+            </a:outerShdw>
+          </a:effectLst>
+        </p:spPr>
+        <p:style>
+          <a:lnRef idx="2">
+            <a:schemeClr val="accent1">
+              <a:shade val="50000"/>
+            </a:schemeClr>
+          </a:lnRef>
+          <a:fillRef idx="1">
+            <a:schemeClr val="accent1"/>
+          </a:fillRef>
+          <a:effectRef idx="0">
+            <a:schemeClr val="accent1"/>
+          </a:effectRef>
+          <a:fontRef idx="minor">
+            <a:schemeClr val="lt1"/>
+          </a:fontRef>
+        </p:style>
+        <p:txBody>
+          <a:bodyPr rtlCol="0" anchor="ctr"/>
+          <a:lstStyle/>
+          <a:p>
+            <a:pPr algn="ctr"/>
+            <a:endParaRPr lang="ko-KR" altLang="en-US" dirty="0">
+              <a:solidFill>
+                <a:prstClr val="white"/>
+              </a:solidFill>
+            </a:endParaRPr>
+          </a:p>
+        </p:txBody>
+      </p:sp>
+      <p:sp>
+        <p:nvSpPr>
+          <p:cNvPr id="11" name="모서리가 둥근 직사각형 4">
+            <a:extLst>
+              <a:ext uri="{FF2B5EF4-FFF2-40B4-BE49-F238E27FC236}">
+                <a16:creationId xmlns:a16="http://schemas.microsoft.com/office/drawing/2014/main" id="{F364C913-7CA1-C469-6931-E14797FFD06C}"/>
+              </a:ext>
+            </a:extLst>
+          </p:cNvPr>
+          <p:cNvSpPr/>
+          <p:nvPr/>
+        </p:nvSpPr>
+        <p:spPr>
+          <a:xfrm>
+            <a:off x="909113" y="5237562"/>
+            <a:ext cx="3538268" cy="797378"/>
+          </a:xfrm>
+          <a:prstGeom prst="rect">
+            <a:avLst/>
+          </a:prstGeom>
+          <a:solidFill>
+            <a:schemeClr val="tx1">
+              <a:alpha val="18000"/>
+            </a:schemeClr>
+          </a:solidFill>
+          <a:ln>
+            <a:noFill/>
+          </a:ln>
+          <a:effectLst>
+            <a:outerShdw blurRad="228600" dist="38100" dir="5400000" algn="t" rotWithShape="0">
+              <a:prstClr val="black">
+                <a:alpha val="40000"/>
+              </a:prstClr>
+            </a:outerShdw>
+          </a:effectLst>
+        </p:spPr>
+        <p:style>
+          <a:lnRef idx="2">
+            <a:schemeClr val="accent1">
+              <a:shade val="50000"/>
+            </a:schemeClr>
+          </a:lnRef>
+          <a:fillRef idx="1">
+            <a:schemeClr val="accent1"/>
+          </a:fillRef>
+          <a:effectRef idx="0">
+            <a:schemeClr val="accent1"/>
+          </a:effectRef>
+          <a:fontRef idx="minor">
+            <a:schemeClr val="lt1"/>
+          </a:fontRef>
+        </p:style>
+        <p:txBody>
+          <a:bodyPr rtlCol="0" anchor="ctr"/>
+          <a:lstStyle/>
+          <a:p>
+            <a:pPr algn="ctr"/>
+            <a:r>
+              <a:rPr lang="ko-KR" altLang="en-US">
+                <a:solidFill>
+                  <a:prstClr val="white"/>
+                </a:solidFill>
+              </a:rPr>
+              <a:t>회원가입</a:t>
+            </a:r>
+            <a:endParaRPr lang="ko-KR" altLang="en-US" dirty="0">
+              <a:solidFill>
+                <a:prstClr val="white"/>
+              </a:solidFill>
+            </a:endParaRPr>
+          </a:p>
+        </p:txBody>
+      </p:sp>
+      <p:sp>
+        <p:nvSpPr>
+          <p:cNvPr id="14" name="모서리가 둥근 직사각형 4">
+            <a:extLst>
+              <a:ext uri="{FF2B5EF4-FFF2-40B4-BE49-F238E27FC236}">
+                <a16:creationId xmlns:a16="http://schemas.microsoft.com/office/drawing/2014/main" id="{0197A3F5-1D72-CFF3-190A-AEE5FADC655D}"/>
+              </a:ext>
+            </a:extLst>
+          </p:cNvPr>
+          <p:cNvSpPr/>
+          <p:nvPr/>
+        </p:nvSpPr>
+        <p:spPr>
+          <a:xfrm>
+            <a:off x="7369218" y="1619040"/>
+            <a:ext cx="3840960" cy="4602145"/>
+          </a:xfrm>
+          <a:prstGeom prst="rect">
+            <a:avLst/>
+          </a:prstGeom>
+          <a:solidFill>
+            <a:schemeClr val="tx1">
+              <a:alpha val="18000"/>
+            </a:schemeClr>
+          </a:solidFill>
+          <a:ln>
+            <a:noFill/>
+          </a:ln>
+          <a:effectLst>
+            <a:outerShdw blurRad="228600" dist="38100" dir="5400000" algn="t" rotWithShape="0">
+              <a:prstClr val="black">
+                <a:alpha val="40000"/>
+              </a:prstClr>
+            </a:outerShdw>
+          </a:effectLst>
+        </p:spPr>
+        <p:style>
+          <a:lnRef idx="2">
+            <a:schemeClr val="accent1">
+              <a:shade val="50000"/>
+            </a:schemeClr>
+          </a:lnRef>
+          <a:fillRef idx="1">
+            <a:schemeClr val="accent1"/>
+          </a:fillRef>
+          <a:effectRef idx="0">
+            <a:schemeClr val="accent1"/>
+          </a:effectRef>
+          <a:fontRef idx="minor">
+            <a:schemeClr val="lt1"/>
+          </a:fontRef>
+        </p:style>
+        <p:txBody>
+          <a:bodyPr rtlCol="0" anchor="ctr"/>
+          <a:lstStyle/>
+          <a:p>
+            <a:pPr algn="ctr"/>
+            <a:endParaRPr lang="ko-KR" altLang="en-US" dirty="0">
+              <a:solidFill>
+                <a:prstClr val="white"/>
+              </a:solidFill>
+            </a:endParaRPr>
+          </a:p>
+        </p:txBody>
+      </p:sp>
+      <p:grpSp>
+        <p:nvGrpSpPr>
+          <p:cNvPr id="15" name="그룹 14">
+            <a:extLst>
+              <a:ext uri="{FF2B5EF4-FFF2-40B4-BE49-F238E27FC236}">
+                <a16:creationId xmlns:a16="http://schemas.microsoft.com/office/drawing/2014/main" id="{6E9959E2-028C-012F-9055-D44AFB2E6651}"/>
+              </a:ext>
+            </a:extLst>
+          </p:cNvPr>
+          <p:cNvGrpSpPr/>
+          <p:nvPr/>
+        </p:nvGrpSpPr>
+        <p:grpSpPr>
+          <a:xfrm>
+            <a:off x="10872629" y="1620437"/>
+            <a:ext cx="337549" cy="373271"/>
+            <a:chOff x="829310" y="702129"/>
+            <a:chExt cx="828040" cy="791936"/>
+          </a:xfrm>
+        </p:grpSpPr>
+        <p:sp>
+          <p:nvSpPr>
+            <p:cNvPr id="16" name="모서리가 둥근 직사각형 4">
+              <a:extLst>
+                <a:ext uri="{FF2B5EF4-FFF2-40B4-BE49-F238E27FC236}">
+                  <a16:creationId xmlns:a16="http://schemas.microsoft.com/office/drawing/2014/main" id="{CAA01113-0558-6874-2D90-56CBAF9EDDA2}"/>
+                </a:ext>
+              </a:extLst>
+            </p:cNvPr>
+            <p:cNvSpPr/>
+            <p:nvPr/>
+          </p:nvSpPr>
+          <p:spPr>
+            <a:xfrm>
+              <a:off x="840921" y="702129"/>
+              <a:ext cx="816429" cy="791936"/>
+            </a:xfrm>
+            <a:prstGeom prst="rect">
+              <a:avLst/>
+            </a:prstGeom>
+            <a:ln/>
+          </p:spPr>
+          <p:style>
+            <a:lnRef idx="2">
+              <a:schemeClr val="accent2"/>
+            </a:lnRef>
+            <a:fillRef idx="1">
+              <a:schemeClr val="lt1"/>
+            </a:fillRef>
+            <a:effectRef idx="0">
+              <a:schemeClr val="accent2"/>
+            </a:effectRef>
+            <a:fontRef idx="minor">
+              <a:schemeClr val="dk1"/>
+            </a:fontRef>
+          </p:style>
+          <p:txBody>
+            <a:bodyPr rtlCol="0" anchor="ctr"/>
+            <a:lstStyle/>
+            <a:p>
+              <a:pPr algn="ctr"/>
+              <a:endParaRPr lang="ko-KR" altLang="en-US">
+                <a:solidFill>
+                  <a:prstClr val="white"/>
+                </a:solidFill>
+              </a:endParaRPr>
+            </a:p>
+          </p:txBody>
+        </p:sp>
+        <p:cxnSp>
+          <p:nvCxnSpPr>
+            <p:cNvPr id="17" name="직선 연결선 16">
+              <a:extLst>
+                <a:ext uri="{FF2B5EF4-FFF2-40B4-BE49-F238E27FC236}">
+                  <a16:creationId xmlns:a16="http://schemas.microsoft.com/office/drawing/2014/main" id="{2F0F3E2F-C23E-415D-C1B4-BE0BBAA3AB0D}"/>
+                </a:ext>
+              </a:extLst>
+            </p:cNvPr>
+            <p:cNvCxnSpPr/>
+            <p:nvPr/>
+          </p:nvCxnSpPr>
+          <p:spPr>
+            <a:xfrm flipV="1">
+              <a:off x="829310" y="732470"/>
+              <a:ext cx="828040" cy="761595"/>
+            </a:xfrm>
+            <a:prstGeom prst="line">
+              <a:avLst/>
+            </a:prstGeom>
+          </p:spPr>
+          <p:style>
+            <a:lnRef idx="2">
+              <a:schemeClr val="accent2"/>
+            </a:lnRef>
+            <a:fillRef idx="1">
+              <a:schemeClr val="lt1"/>
+            </a:fillRef>
+            <a:effectRef idx="0">
+              <a:schemeClr val="accent2"/>
+            </a:effectRef>
+            <a:fontRef idx="minor">
+              <a:schemeClr val="dk1"/>
+            </a:fontRef>
+          </p:style>
+        </p:cxnSp>
+        <p:cxnSp>
+          <p:nvCxnSpPr>
+            <p:cNvPr id="18" name="직선 연결선 17">
+              <a:extLst>
+                <a:ext uri="{FF2B5EF4-FFF2-40B4-BE49-F238E27FC236}">
+                  <a16:creationId xmlns:a16="http://schemas.microsoft.com/office/drawing/2014/main" id="{D6C80B40-979E-230B-C0D7-B1937D4E163E}"/>
+                </a:ext>
+              </a:extLst>
+            </p:cNvPr>
+            <p:cNvCxnSpPr/>
+            <p:nvPr/>
+          </p:nvCxnSpPr>
+          <p:spPr>
+            <a:xfrm>
+              <a:off x="829310" y="702129"/>
+              <a:ext cx="828040" cy="788973"/>
+            </a:xfrm>
+            <a:prstGeom prst="line">
+              <a:avLst/>
+            </a:prstGeom>
+          </p:spPr>
+          <p:style>
+            <a:lnRef idx="2">
+              <a:schemeClr val="accent2"/>
+            </a:lnRef>
+            <a:fillRef idx="1">
+              <a:schemeClr val="lt1"/>
+            </a:fillRef>
+            <a:effectRef idx="0">
+              <a:schemeClr val="accent2"/>
+            </a:effectRef>
+            <a:fontRef idx="minor">
+              <a:schemeClr val="dk1"/>
+            </a:fontRef>
+          </p:style>
+        </p:cxnSp>
+      </p:grpSp>
+      <p:sp>
+        <p:nvSpPr>
+          <p:cNvPr id="20" name="모서리가 둥근 직사각형 4">
+            <a:extLst>
+              <a:ext uri="{FF2B5EF4-FFF2-40B4-BE49-F238E27FC236}">
+                <a16:creationId xmlns:a16="http://schemas.microsoft.com/office/drawing/2014/main" id="{6CB7F6B3-81EC-1A90-0AC7-71AA5FF9F7A4}"/>
+              </a:ext>
+            </a:extLst>
+          </p:cNvPr>
+          <p:cNvSpPr/>
+          <p:nvPr/>
+        </p:nvSpPr>
+        <p:spPr>
+          <a:xfrm>
+            <a:off x="7364512" y="2006612"/>
+            <a:ext cx="3840960" cy="4214573"/>
+          </a:xfrm>
+          <a:prstGeom prst="rect">
+            <a:avLst/>
+          </a:prstGeom>
+          <a:solidFill>
+            <a:schemeClr val="tx1">
+              <a:alpha val="18000"/>
+            </a:schemeClr>
+          </a:solidFill>
+          <a:ln>
+            <a:noFill/>
+          </a:ln>
+          <a:effectLst>
+            <a:outerShdw blurRad="228600" dist="38100" dir="5400000" algn="t" rotWithShape="0">
+              <a:prstClr val="black">
+                <a:alpha val="40000"/>
+              </a:prstClr>
+            </a:outerShdw>
+          </a:effectLst>
+        </p:spPr>
+        <p:style>
+          <a:lnRef idx="2">
+            <a:schemeClr val="accent1">
+              <a:shade val="50000"/>
+            </a:schemeClr>
+          </a:lnRef>
+          <a:fillRef idx="1">
+            <a:schemeClr val="accent1"/>
+          </a:fillRef>
+          <a:effectRef idx="0">
+            <a:schemeClr val="accent1"/>
+          </a:effectRef>
+          <a:fontRef idx="minor">
+            <a:schemeClr val="lt1"/>
+          </a:fontRef>
+        </p:style>
+        <p:txBody>
+          <a:bodyPr rtlCol="0" anchor="ctr"/>
+          <a:lstStyle/>
+          <a:p>
+            <a:pPr algn="ctr"/>
+            <a:endParaRPr lang="ko-KR" altLang="en-US" dirty="0">
+              <a:solidFill>
+                <a:prstClr val="white"/>
+              </a:solidFill>
+            </a:endParaRPr>
+          </a:p>
+        </p:txBody>
+      </p:sp>
+      <p:sp>
+        <p:nvSpPr>
+          <p:cNvPr id="21" name="모서리가 둥근 직사각형 4">
+            <a:extLst>
+              <a:ext uri="{FF2B5EF4-FFF2-40B4-BE49-F238E27FC236}">
+                <a16:creationId xmlns:a16="http://schemas.microsoft.com/office/drawing/2014/main" id="{DF4A21D8-38DB-2B2A-B5BC-A9DC377B7480}"/>
+              </a:ext>
+            </a:extLst>
+          </p:cNvPr>
+          <p:cNvSpPr/>
+          <p:nvPr/>
+        </p:nvSpPr>
+        <p:spPr>
+          <a:xfrm>
+            <a:off x="7515858" y="2155252"/>
+            <a:ext cx="3538268" cy="2881379"/>
+          </a:xfrm>
+          <a:prstGeom prst="rect">
+            <a:avLst/>
+          </a:prstGeom>
+          <a:solidFill>
+            <a:schemeClr val="tx1">
+              <a:alpha val="18000"/>
+            </a:schemeClr>
+          </a:solidFill>
+          <a:ln>
+            <a:noFill/>
+          </a:ln>
+          <a:effectLst>
+            <a:outerShdw blurRad="228600" dist="38100" dir="5400000" algn="t" rotWithShape="0">
+              <a:prstClr val="black">
+                <a:alpha val="40000"/>
+              </a:prstClr>
+            </a:outerShdw>
+          </a:effectLst>
+        </p:spPr>
+        <p:style>
+          <a:lnRef idx="2">
+            <a:schemeClr val="accent1">
+              <a:shade val="50000"/>
+            </a:schemeClr>
+          </a:lnRef>
+          <a:fillRef idx="1">
+            <a:schemeClr val="accent1"/>
+          </a:fillRef>
+          <a:effectRef idx="0">
+            <a:schemeClr val="accent1"/>
+          </a:effectRef>
+          <a:fontRef idx="minor">
+            <a:schemeClr val="lt1"/>
+          </a:fontRef>
+        </p:style>
+        <p:txBody>
+          <a:bodyPr rtlCol="0" anchor="ctr"/>
+          <a:lstStyle/>
+          <a:p>
+            <a:pPr algn="ctr"/>
+            <a:r>
+              <a:rPr lang="ko-KR" altLang="en-US" dirty="0">
+                <a:solidFill>
+                  <a:prstClr val="white"/>
+                </a:solidFill>
+              </a:rPr>
+              <a:t>프로필 정보</a:t>
+            </a:r>
+          </a:p>
+        </p:txBody>
+      </p:sp>
+      <p:sp>
+        <p:nvSpPr>
+          <p:cNvPr id="22" name="모서리가 둥근 직사각형 4">
+            <a:extLst>
+              <a:ext uri="{FF2B5EF4-FFF2-40B4-BE49-F238E27FC236}">
+                <a16:creationId xmlns:a16="http://schemas.microsoft.com/office/drawing/2014/main" id="{CDF75EEA-060C-3CED-961F-4A01EE0E1749}"/>
+              </a:ext>
+            </a:extLst>
+          </p:cNvPr>
+          <p:cNvSpPr/>
+          <p:nvPr/>
+        </p:nvSpPr>
+        <p:spPr>
+          <a:xfrm>
+            <a:off x="7515858" y="5206243"/>
+            <a:ext cx="3538268" cy="828697"/>
+          </a:xfrm>
+          <a:prstGeom prst="rect">
+            <a:avLst/>
+          </a:prstGeom>
+          <a:solidFill>
+            <a:schemeClr val="tx1">
+              <a:alpha val="18000"/>
+            </a:schemeClr>
+          </a:solidFill>
+          <a:ln>
+            <a:noFill/>
+          </a:ln>
+          <a:effectLst>
+            <a:outerShdw blurRad="228600" dist="38100" dir="5400000" algn="t" rotWithShape="0">
+              <a:prstClr val="black">
+                <a:alpha val="40000"/>
+              </a:prstClr>
+            </a:outerShdw>
+          </a:effectLst>
+        </p:spPr>
+        <p:style>
+          <a:lnRef idx="2">
+            <a:schemeClr val="accent1">
+              <a:shade val="50000"/>
+            </a:schemeClr>
+          </a:lnRef>
+          <a:fillRef idx="1">
+            <a:schemeClr val="accent1"/>
+          </a:fillRef>
+          <a:effectRef idx="0">
+            <a:schemeClr val="accent1"/>
+          </a:effectRef>
+          <a:fontRef idx="minor">
+            <a:schemeClr val="lt1"/>
+          </a:fontRef>
+        </p:style>
+        <p:txBody>
+          <a:bodyPr rtlCol="0" anchor="ctr"/>
+          <a:lstStyle/>
+          <a:p>
+            <a:pPr algn="ctr"/>
+            <a:r>
+              <a:rPr lang="ko-KR" altLang="en-US" dirty="0">
+                <a:solidFill>
+                  <a:prstClr val="white"/>
+                </a:solidFill>
+              </a:rPr>
+              <a:t>로그아웃</a:t>
+            </a:r>
+          </a:p>
+        </p:txBody>
+      </p:sp>
+      <p:sp>
+        <p:nvSpPr>
+          <p:cNvPr id="12" name="직사각형 11">
+            <a:extLst>
+              <a:ext uri="{FF2B5EF4-FFF2-40B4-BE49-F238E27FC236}">
+                <a16:creationId xmlns:a16="http://schemas.microsoft.com/office/drawing/2014/main" id="{1631CBEE-07CA-B575-7F59-3F923612DE15}"/>
+              </a:ext>
+            </a:extLst>
+          </p:cNvPr>
+          <p:cNvSpPr/>
+          <p:nvPr/>
+        </p:nvSpPr>
+        <p:spPr>
+          <a:xfrm>
+            <a:off x="1137873" y="2548571"/>
+            <a:ext cx="3066733" cy="457200"/>
+          </a:xfrm>
+          <a:prstGeom prst="rect">
+            <a:avLst/>
+          </a:prstGeom>
+        </p:spPr>
+        <p:style>
+          <a:lnRef idx="2">
+            <a:schemeClr val="accent1">
+              <a:shade val="15000"/>
+            </a:schemeClr>
+          </a:lnRef>
+          <a:fillRef idx="1">
+            <a:schemeClr val="accent1"/>
+          </a:fillRef>
+          <a:effectRef idx="0">
+            <a:schemeClr val="accent1"/>
+          </a:effectRef>
+          <a:fontRef idx="minor">
+            <a:schemeClr val="lt1"/>
+          </a:fontRef>
+        </p:style>
+        <p:txBody>
+          <a:bodyPr rtlCol="0" anchor="ctr"/>
+          <a:lstStyle/>
+          <a:p>
+            <a:pPr algn="ctr"/>
+            <a:r>
+              <a:rPr lang="en-US" altLang="ko-KR" dirty="0"/>
+              <a:t>ID</a:t>
+            </a:r>
+            <a:endParaRPr lang="ko-KR" altLang="en-US" dirty="0"/>
+          </a:p>
+        </p:txBody>
+      </p:sp>
+      <p:sp>
+        <p:nvSpPr>
+          <p:cNvPr id="13" name="직사각형 12">
+            <a:extLst>
+              <a:ext uri="{FF2B5EF4-FFF2-40B4-BE49-F238E27FC236}">
+                <a16:creationId xmlns:a16="http://schemas.microsoft.com/office/drawing/2014/main" id="{BEC73D13-207D-970F-F57C-9F791A0BAF7E}"/>
+              </a:ext>
+            </a:extLst>
+          </p:cNvPr>
+          <p:cNvSpPr/>
+          <p:nvPr/>
+        </p:nvSpPr>
+        <p:spPr>
+          <a:xfrm>
+            <a:off x="1137872" y="3138741"/>
+            <a:ext cx="3066733" cy="457200"/>
+          </a:xfrm>
+          <a:prstGeom prst="rect">
+            <a:avLst/>
+          </a:prstGeom>
+        </p:spPr>
+        <p:style>
+          <a:lnRef idx="2">
+            <a:schemeClr val="accent1">
+              <a:shade val="15000"/>
+            </a:schemeClr>
+          </a:lnRef>
+          <a:fillRef idx="1">
+            <a:schemeClr val="accent1"/>
+          </a:fillRef>
+          <a:effectRef idx="0">
+            <a:schemeClr val="accent1"/>
+          </a:effectRef>
+          <a:fontRef idx="minor">
+            <a:schemeClr val="lt1"/>
+          </a:fontRef>
+        </p:style>
+        <p:txBody>
+          <a:bodyPr rtlCol="0" anchor="ctr"/>
+          <a:lstStyle/>
+          <a:p>
+            <a:pPr algn="ctr"/>
+            <a:r>
+              <a:rPr lang="en-US" altLang="ko-KR"/>
+              <a:t>PW</a:t>
+            </a:r>
+            <a:endParaRPr lang="ko-KR" altLang="en-US" dirty="0"/>
+          </a:p>
+        </p:txBody>
+      </p:sp>
+      <p:sp>
+        <p:nvSpPr>
+          <p:cNvPr id="19" name="직사각형 18">
+            <a:extLst>
+              <a:ext uri="{FF2B5EF4-FFF2-40B4-BE49-F238E27FC236}">
+                <a16:creationId xmlns:a16="http://schemas.microsoft.com/office/drawing/2014/main" id="{23ABFB8F-9322-688D-F699-0D9DE7BE639D}"/>
+              </a:ext>
+            </a:extLst>
+          </p:cNvPr>
+          <p:cNvSpPr/>
+          <p:nvPr/>
+        </p:nvSpPr>
+        <p:spPr>
+          <a:xfrm>
+            <a:off x="1137871" y="4453944"/>
+            <a:ext cx="3066733" cy="457200"/>
+          </a:xfrm>
+          <a:prstGeom prst="rect">
+            <a:avLst/>
+          </a:prstGeom>
+        </p:spPr>
+        <p:style>
+          <a:lnRef idx="2">
+            <a:schemeClr val="accent1">
+              <a:shade val="15000"/>
+            </a:schemeClr>
+          </a:lnRef>
+          <a:fillRef idx="1">
+            <a:schemeClr val="accent1"/>
+          </a:fillRef>
+          <a:effectRef idx="0">
+            <a:schemeClr val="accent1"/>
+          </a:effectRef>
+          <a:fontRef idx="minor">
+            <a:schemeClr val="lt1"/>
+          </a:fontRef>
+        </p:style>
+        <p:txBody>
+          <a:bodyPr rtlCol="0" anchor="ctr"/>
+          <a:lstStyle/>
+          <a:p>
+            <a:pPr algn="ctr"/>
+            <a:r>
+              <a:rPr lang="en-US" altLang="ko-KR" dirty="0"/>
+              <a:t>Login</a:t>
+            </a:r>
+            <a:endParaRPr lang="ko-KR" altLang="en-US" dirty="0"/>
+          </a:p>
+        </p:txBody>
+      </p:sp>
+    </p:spTree>
+    <p:extLst>
+      <p:ext uri="{BB962C8B-B14F-4D97-AF65-F5344CB8AC3E}">
+        <p14:creationId xmlns:p14="http://schemas.microsoft.com/office/powerpoint/2010/main" val="1194596477"/>
+      </p:ext>
+    </p:extLst>
+  </p:cSld>
+  <p:clrMapOvr>
+    <a:masterClrMapping/>
+  </p:clrMapOvr>
+</p:sld>
+</file>
+
+<file path=ppt/slides/slide6.xml><?xml version="1.0" encoding="utf-8"?>
+<p:sld xmlns:a="http://schemas.openxmlformats.org/drawingml/2006/main" xmlns:r="http://schemas.openxmlformats.org/officeDocument/2006/relationships" xmlns:p="http://schemas.openxmlformats.org/presentationml/2006/main">
+  <p:cSld>
+    <p:spTree>
+      <p:nvGrpSpPr>
+        <p:cNvPr id="1" name=""/>
+        <p:cNvGrpSpPr/>
+        <p:nvPr/>
+      </p:nvGrpSpPr>
+      <p:grpSpPr>
+        <a:xfrm>
+          <a:off x="0" y="0"/>
+          <a:ext cx="0" cy="0"/>
+          <a:chOff x="0" y="0"/>
+          <a:chExt cx="0" cy="0"/>
+        </a:xfrm>
+      </p:grpSpPr>
+      <p:grpSp>
+        <p:nvGrpSpPr>
+          <p:cNvPr id="3" name="그룹 2"/>
+          <p:cNvGrpSpPr/>
+          <p:nvPr/>
+        </p:nvGrpSpPr>
+        <p:grpSpPr>
+          <a:xfrm>
+            <a:off x="6929" y="-204107"/>
+            <a:ext cx="12178141" cy="6858000"/>
+            <a:chOff x="13858" y="0"/>
+            <a:chExt cx="12178141" cy="6858000"/>
+          </a:xfrm>
+        </p:grpSpPr>
+        <p:sp>
+          <p:nvSpPr>
+            <p:cNvPr id="7" name="모서리가 둥근 직사각형 4">
+              <a:extLst>
+                <a:ext uri="{FF2B5EF4-FFF2-40B4-BE49-F238E27FC236}">
+                  <a16:creationId xmlns:a16="http://schemas.microsoft.com/office/drawing/2014/main" id="{313104EB-6B40-EAB0-156C-047965625EAB}"/>
+                </a:ext>
+              </a:extLst>
+            </p:cNvPr>
+            <p:cNvSpPr/>
+            <p:nvPr/>
+          </p:nvSpPr>
+          <p:spPr>
+            <a:xfrm>
+              <a:off x="13858" y="0"/>
+              <a:ext cx="12178141" cy="6858000"/>
+            </a:xfrm>
+            <a:prstGeom prst="roundRect">
+              <a:avLst>
+                <a:gd name="adj" fmla="val 3484"/>
+              </a:avLst>
+            </a:prstGeom>
+            <a:solidFill>
+              <a:srgbClr val="646C79"/>
+            </a:solidFill>
+            <a:ln>
+              <a:noFill/>
+            </a:ln>
+            <a:effectLst>
+              <a:outerShdw blurRad="228600" dist="38100" dir="5400000" algn="t" rotWithShape="0">
+                <a:prstClr val="black">
+                  <a:alpha val="40000"/>
+                </a:prstClr>
+              </a:outerShdw>
+            </a:effectLst>
+          </p:spPr>
+          <p:style>
+            <a:lnRef idx="2">
+              <a:schemeClr val="accent1">
+                <a:shade val="50000"/>
+              </a:schemeClr>
+            </a:lnRef>
+            <a:fillRef idx="1">
+              <a:schemeClr val="accent1"/>
+            </a:fillRef>
+            <a:effectRef idx="0">
+              <a:schemeClr val="accent1"/>
+            </a:effectRef>
+            <a:fontRef idx="minor">
+              <a:schemeClr val="lt1"/>
+            </a:fontRef>
+          </p:style>
+          <p:txBody>
+            <a:bodyPr rtlCol="0" anchor="ctr"/>
+            <a:lstStyle/>
+            <a:p>
+              <a:pPr algn="ctr"/>
+              <a:endParaRPr lang="ko-KR" altLang="en-US">
+                <a:solidFill>
+                  <a:prstClr val="white"/>
+                </a:solidFill>
+              </a:endParaRPr>
+            </a:p>
+          </p:txBody>
+        </p:sp>
+        <p:sp>
+          <p:nvSpPr>
+            <p:cNvPr id="8" name="모서리가 둥근 직사각형 5">
+              <a:extLst>
+                <a:ext uri="{FF2B5EF4-FFF2-40B4-BE49-F238E27FC236}">
+                  <a16:creationId xmlns:a16="http://schemas.microsoft.com/office/drawing/2014/main" id="{FE48B50B-F229-12E5-2CEA-0361300EEF8E}"/>
+                </a:ext>
+              </a:extLst>
+            </p:cNvPr>
+            <p:cNvSpPr/>
+            <p:nvPr/>
+          </p:nvSpPr>
+          <p:spPr>
+            <a:xfrm>
+              <a:off x="275080" y="169164"/>
+              <a:ext cx="11916919" cy="6688836"/>
+            </a:xfrm>
+            <a:prstGeom prst="roundRect">
+              <a:avLst>
+                <a:gd name="adj" fmla="val 3446"/>
+              </a:avLst>
+            </a:prstGeom>
+            <a:solidFill>
+              <a:srgbClr val="F2F2F2"/>
+            </a:solidFill>
+            <a:ln>
+              <a:noFill/>
+            </a:ln>
+          </p:spPr>
+          <p:style>
+            <a:lnRef idx="2">
+              <a:schemeClr val="accent1">
+                <a:shade val="50000"/>
+              </a:schemeClr>
+            </a:lnRef>
+            <a:fillRef idx="1">
+              <a:schemeClr val="accent1"/>
+            </a:fillRef>
+            <a:effectRef idx="0">
+              <a:schemeClr val="accent1"/>
+            </a:effectRef>
+            <a:fontRef idx="minor">
+              <a:schemeClr val="lt1"/>
+            </a:fontRef>
+          </p:style>
+          <p:txBody>
+            <a:bodyPr lIns="288000" tIns="252000" rtlCol="0" anchor="t"/>
+            <a:lstStyle/>
+            <a:p>
+              <a:pPr latinLnBrk="0">
+                <a:lnSpc>
+                  <a:spcPct val="150000"/>
+                </a:lnSpc>
+                <a:defRPr/>
+              </a:pPr>
+              <a:endParaRPr lang="ko-KR" altLang="en-US" sz="1600" dirty="0">
+                <a:solidFill>
+                  <a:srgbClr val="646C79"/>
+                </a:solidFill>
+              </a:endParaRPr>
+            </a:p>
+          </p:txBody>
+        </p:sp>
+      </p:grpSp>
+      <p:sp>
+        <p:nvSpPr>
+          <p:cNvPr id="9" name="사각형: 둥근 모서리 8">
+            <a:extLst>
+              <a:ext uri="{FF2B5EF4-FFF2-40B4-BE49-F238E27FC236}">
+                <a16:creationId xmlns:a16="http://schemas.microsoft.com/office/drawing/2014/main" id="{86BCEDDA-BD45-3BF8-BEDE-9C9852DEA195}"/>
+              </a:ext>
+            </a:extLst>
+          </p:cNvPr>
+          <p:cNvSpPr/>
+          <p:nvPr/>
+        </p:nvSpPr>
+        <p:spPr>
+          <a:xfrm>
+            <a:off x="575582" y="164682"/>
+            <a:ext cx="6226302" cy="449580"/>
+          </a:xfrm>
+          <a:prstGeom prst="roundRect">
+            <a:avLst>
+              <a:gd name="adj" fmla="val 50000"/>
+            </a:avLst>
+          </a:prstGeom>
+          <a:solidFill>
+            <a:srgbClr val="FF5050"/>
+          </a:solidFill>
+          <a:ln>
+            <a:noFill/>
+          </a:ln>
+          <a:effectLst>
+            <a:outerShdw blurRad="190500" dist="38100" dir="5400000" algn="t" rotWithShape="0">
+              <a:srgbClr val="489BFB">
+                <a:alpha val="17000"/>
+              </a:srgbClr>
+            </a:outerShdw>
+          </a:effectLst>
+        </p:spPr>
+        <p:style>
+          <a:lnRef idx="2">
+            <a:schemeClr val="accent1">
+              <a:shade val="50000"/>
+            </a:schemeClr>
+          </a:lnRef>
+          <a:fillRef idx="1">
+            <a:schemeClr val="accent1"/>
+          </a:fillRef>
+          <a:effectRef idx="0">
+            <a:schemeClr val="accent1"/>
+          </a:effectRef>
+          <a:fontRef idx="minor">
+            <a:schemeClr val="lt1"/>
+          </a:fontRef>
+        </p:style>
+        <p:txBody>
+          <a:bodyPr rtlCol="0" anchor="ctr"/>
+          <a:lstStyle/>
+          <a:p>
+            <a:pPr marL="180975">
+              <a:tabLst>
+                <a:tab pos="1524000" algn="l"/>
+                <a:tab pos="2419350" algn="l"/>
+              </a:tabLst>
+              <a:defRPr/>
+            </a:pPr>
+            <a:r>
+              <a:rPr lang="ko-KR" altLang="en-US" sz="2000" dirty="0">
+                <a:solidFill>
+                  <a:schemeClr val="bg1"/>
+                </a:solidFill>
+              </a:rPr>
+              <a:t>화면 구성 및 레이아웃 설계 </a:t>
+            </a:r>
+            <a:r>
+              <a:rPr lang="en-US" altLang="ko-KR" sz="700" dirty="0">
+                <a:solidFill>
+                  <a:schemeClr val="bg1"/>
+                </a:solidFill>
+              </a:rPr>
+              <a:t>Price Navi</a:t>
+            </a:r>
+            <a:endParaRPr lang="ko-KR" altLang="en-US" sz="700" dirty="0">
+              <a:solidFill>
+                <a:schemeClr val="bg1"/>
+              </a:solidFill>
+            </a:endParaRPr>
+          </a:p>
+        </p:txBody>
+      </p:sp>
+      <p:sp>
+        <p:nvSpPr>
+          <p:cNvPr id="10" name="직사각형 9">
+            <a:extLst>
+              <a:ext uri="{FF2B5EF4-FFF2-40B4-BE49-F238E27FC236}">
+                <a16:creationId xmlns:a16="http://schemas.microsoft.com/office/drawing/2014/main" id="{A1B01137-666C-5FA9-BB1D-5FFFCAA624FD}"/>
+              </a:ext>
+            </a:extLst>
+          </p:cNvPr>
+          <p:cNvSpPr/>
+          <p:nvPr/>
+        </p:nvSpPr>
+        <p:spPr>
+          <a:xfrm>
             <a:off x="563969" y="709550"/>
             <a:ext cx="11348267" cy="5731328"/>
           </a:xfrm>
@@ -9122,7 +10416,7 @@
 </p:sld>
 </file>
 
-<file path=ppt/slides/slide6.xml><?xml version="1.0" encoding="utf-8"?>
+<file path=ppt/slides/slide7.xml><?xml version="1.0" encoding="utf-8"?>
 <p:sld xmlns:a="http://schemas.openxmlformats.org/drawingml/2006/main" xmlns:r="http://schemas.openxmlformats.org/officeDocument/2006/relationships" xmlns:p="http://schemas.openxmlformats.org/presentationml/2006/main">
   <p:cSld>
     <p:spTree>
@@ -10420,7 +11714,7 @@
 </p:sld>
 </file>
 
-<file path=ppt/slides/slide7.xml><?xml version="1.0" encoding="utf-8"?>
+<file path=ppt/slides/slide8.xml><?xml version="1.0" encoding="utf-8"?>
 <p:sld xmlns:a="http://schemas.openxmlformats.org/drawingml/2006/main" xmlns:r="http://schemas.openxmlformats.org/officeDocument/2006/relationships" xmlns:p="http://schemas.openxmlformats.org/presentationml/2006/main">
   <p:cSld>
     <p:spTree>
@@ -11597,7 +12891,7 @@
 </p:sld>
 </file>
 
-<file path=ppt/slides/slide8.xml><?xml version="1.0" encoding="utf-8"?>
+<file path=ppt/slides/slide9.xml><?xml version="1.0" encoding="utf-8"?>
 <p:sld xmlns:a="http://schemas.openxmlformats.org/drawingml/2006/main" xmlns:r="http://schemas.openxmlformats.org/officeDocument/2006/relationships" xmlns:p="http://schemas.openxmlformats.org/presentationml/2006/main">
   <p:cSld>
     <p:spTree>

--- a/docs/ProgramPlan.pptx.pptx
+++ b/docs/ProgramPlan.pptx.pptx
@@ -9,11 +9,10 @@
     <p:sldId id="267" r:id="rId3"/>
     <p:sldId id="271" r:id="rId4"/>
     <p:sldId id="274" r:id="rId5"/>
-    <p:sldId id="278" r:id="rId6"/>
-    <p:sldId id="272" r:id="rId7"/>
-    <p:sldId id="273" r:id="rId8"/>
-    <p:sldId id="275" r:id="rId9"/>
-    <p:sldId id="276" r:id="rId10"/>
+    <p:sldId id="272" r:id="rId6"/>
+    <p:sldId id="273" r:id="rId7"/>
+    <p:sldId id="275" r:id="rId8"/>
+    <p:sldId id="276" r:id="rId9"/>
   </p:sldIdLst>
   <p:sldSz cx="12192000" cy="6858000"/>
   <p:notesSz cx="6858000" cy="9144000"/>
@@ -274,7 +273,7 @@
                 </a:solidFill>
               </a:rPr>
               <a:pPr/>
-              <a:t>2024-01-16</a:t>
+              <a:t>2024-01-14</a:t>
             </a:fld>
             <a:endParaRPr lang="ko-KR" altLang="en-US" dirty="0">
               <a:solidFill>
@@ -504,7 +503,7 @@
                 </a:solidFill>
               </a:rPr>
               <a:pPr/>
-              <a:t>2024-01-16</a:t>
+              <a:t>2024-01-14</a:t>
             </a:fld>
             <a:endParaRPr lang="ko-KR" altLang="en-US" dirty="0">
               <a:solidFill>
@@ -744,7 +743,7 @@
                 </a:solidFill>
               </a:rPr>
               <a:pPr/>
-              <a:t>2024-01-16</a:t>
+              <a:t>2024-01-14</a:t>
             </a:fld>
             <a:endParaRPr lang="ko-KR" altLang="en-US" dirty="0">
               <a:solidFill>
@@ -974,7 +973,7 @@
                 </a:solidFill>
               </a:rPr>
               <a:pPr/>
-              <a:t>2024-01-16</a:t>
+              <a:t>2024-01-14</a:t>
             </a:fld>
             <a:endParaRPr lang="ko-KR" altLang="en-US" dirty="0">
               <a:solidFill>
@@ -1281,7 +1280,7 @@
                 </a:solidFill>
               </a:rPr>
               <a:pPr/>
-              <a:t>2024-01-16</a:t>
+              <a:t>2024-01-14</a:t>
             </a:fld>
             <a:endParaRPr lang="ko-KR" altLang="en-US" dirty="0">
               <a:solidFill>
@@ -1578,7 +1577,7 @@
                 </a:solidFill>
               </a:rPr>
               <a:pPr/>
-              <a:t>2024-01-16</a:t>
+              <a:t>2024-01-14</a:t>
             </a:fld>
             <a:endParaRPr lang="ko-KR" altLang="en-US" dirty="0">
               <a:solidFill>
@@ -2022,7 +2021,7 @@
                 </a:solidFill>
               </a:rPr>
               <a:pPr/>
-              <a:t>2024-01-16</a:t>
+              <a:t>2024-01-14</a:t>
             </a:fld>
             <a:endParaRPr lang="ko-KR" altLang="en-US" dirty="0">
               <a:solidFill>
@@ -2195,7 +2194,7 @@
                 </a:solidFill>
               </a:rPr>
               <a:pPr/>
-              <a:t>2024-01-16</a:t>
+              <a:t>2024-01-14</a:t>
             </a:fld>
             <a:endParaRPr lang="ko-KR" altLang="en-US" dirty="0">
               <a:solidFill>
@@ -2340,7 +2339,7 @@
                 </a:solidFill>
               </a:rPr>
               <a:pPr/>
-              <a:t>2024-01-16</a:t>
+              <a:t>2024-01-14</a:t>
             </a:fld>
             <a:endParaRPr lang="ko-KR" altLang="en-US" dirty="0">
               <a:solidFill>
@@ -2683,7 +2682,7 @@
                 </a:solidFill>
               </a:rPr>
               <a:pPr/>
-              <a:t>2024-01-16</a:t>
+              <a:t>2024-01-14</a:t>
             </a:fld>
             <a:endParaRPr lang="ko-KR" altLang="en-US" dirty="0">
               <a:solidFill>
@@ -3003,7 +3002,7 @@
                 </a:solidFill>
               </a:rPr>
               <a:pPr/>
-              <a:t>2024-01-16</a:t>
+              <a:t>2024-01-14</a:t>
             </a:fld>
             <a:endParaRPr lang="ko-KR" altLang="en-US" dirty="0">
               <a:solidFill>
@@ -3276,7 +3275,7 @@
                 </a:solidFill>
               </a:rPr>
               <a:pPr/>
-              <a:t>2024-01-16</a:t>
+              <a:t>2024-01-14</a:t>
             </a:fld>
             <a:endParaRPr lang="ko-KR" altLang="en-US" dirty="0">
               <a:solidFill>
@@ -8063,1299 +8062,6 @@
         </p:nvSpPr>
         <p:spPr>
           <a:xfrm>
-            <a:off x="575582" y="823060"/>
-            <a:ext cx="11348267" cy="5731328"/>
-          </a:xfrm>
-          <a:prstGeom prst="rect">
-            <a:avLst/>
-          </a:prstGeom>
-          <a:solidFill>
-            <a:schemeClr val="bg1">
-              <a:lumMod val="85000"/>
-            </a:schemeClr>
-          </a:solidFill>
-        </p:spPr>
-        <p:style>
-          <a:lnRef idx="2">
-            <a:schemeClr val="accent1">
-              <a:shade val="15000"/>
-            </a:schemeClr>
-          </a:lnRef>
-          <a:fillRef idx="1">
-            <a:schemeClr val="accent1"/>
-          </a:fillRef>
-          <a:effectRef idx="0">
-            <a:schemeClr val="accent1"/>
-          </a:effectRef>
-          <a:fontRef idx="minor">
-            <a:schemeClr val="lt1"/>
-          </a:fontRef>
-        </p:style>
-        <p:txBody>
-          <a:bodyPr rtlCol="0" anchor="ctr"/>
-          <a:lstStyle/>
-          <a:p>
-            <a:pPr algn="ctr"/>
-            <a:endParaRPr lang="ko-KR" altLang="en-US"/>
-          </a:p>
-        </p:txBody>
-      </p:sp>
-      <p:sp>
-        <p:nvSpPr>
-          <p:cNvPr id="2" name="사각형: 둥근 모서리 26">
-            <a:extLst>
-              <a:ext uri="{FF2B5EF4-FFF2-40B4-BE49-F238E27FC236}">
-                <a16:creationId xmlns:a16="http://schemas.microsoft.com/office/drawing/2014/main" id="{D2542C75-A310-E3CF-4DE1-FE5C6DBA9A9F}"/>
-              </a:ext>
-            </a:extLst>
-          </p:cNvPr>
-          <p:cNvSpPr/>
-          <p:nvPr/>
-        </p:nvSpPr>
-        <p:spPr>
-          <a:xfrm>
-            <a:off x="9466399" y="99445"/>
-            <a:ext cx="2457450" cy="521040"/>
-          </a:xfrm>
-          <a:prstGeom prst="roundRect">
-            <a:avLst>
-              <a:gd name="adj" fmla="val 50000"/>
-            </a:avLst>
-          </a:prstGeom>
-          <a:solidFill>
-            <a:schemeClr val="tx2">
-              <a:lumMod val="60000"/>
-              <a:lumOff val="40000"/>
-            </a:schemeClr>
-          </a:solidFill>
-          <a:ln>
-            <a:noFill/>
-          </a:ln>
-          <a:effectLst>
-            <a:outerShdw blurRad="63500" sx="102000" sy="102000" algn="ctr" rotWithShape="0">
-              <a:prstClr val="black">
-                <a:alpha val="5000"/>
-              </a:prstClr>
-            </a:outerShdw>
-          </a:effectLst>
-        </p:spPr>
-        <p:style>
-          <a:lnRef idx="2">
-            <a:schemeClr val="accent1">
-              <a:shade val="50000"/>
-            </a:schemeClr>
-          </a:lnRef>
-          <a:fillRef idx="1">
-            <a:schemeClr val="accent1"/>
-          </a:fillRef>
-          <a:effectRef idx="0">
-            <a:schemeClr val="accent1"/>
-          </a:effectRef>
-          <a:fontRef idx="minor">
-            <a:schemeClr val="lt1"/>
-          </a:fontRef>
-        </p:style>
-        <p:txBody>
-          <a:bodyPr wrap="none" rtlCol="0" anchor="ctr"/>
-          <a:lstStyle/>
-          <a:p>
-            <a:pPr algn="ctr"/>
-            <a:r>
-              <a:rPr lang="en-US" altLang="ko-KR" sz="1200" b="1" dirty="0">
-                <a:solidFill>
-                  <a:prstClr val="white"/>
-                </a:solidFill>
-              </a:rPr>
-              <a:t>1.</a:t>
-            </a:r>
-            <a:r>
-              <a:rPr lang="ko-KR" altLang="en-US" sz="1200" b="1" dirty="0">
-                <a:solidFill>
-                  <a:prstClr val="white"/>
-                </a:solidFill>
-              </a:rPr>
-              <a:t>전체 화면</a:t>
-            </a:r>
-          </a:p>
-        </p:txBody>
-      </p:sp>
-      <p:sp>
-        <p:nvSpPr>
-          <p:cNvPr id="4" name="모서리가 둥근 직사각형 4">
-            <a:extLst>
-              <a:ext uri="{FF2B5EF4-FFF2-40B4-BE49-F238E27FC236}">
-                <a16:creationId xmlns:a16="http://schemas.microsoft.com/office/drawing/2014/main" id="{40A7AAE0-858E-D837-9A70-207886924837}"/>
-              </a:ext>
-            </a:extLst>
-          </p:cNvPr>
-          <p:cNvSpPr/>
-          <p:nvPr/>
-        </p:nvSpPr>
-        <p:spPr>
-          <a:xfrm>
-            <a:off x="775196" y="1619041"/>
-            <a:ext cx="3840960" cy="4602145"/>
-          </a:xfrm>
-          <a:prstGeom prst="rect">
-            <a:avLst/>
-          </a:prstGeom>
-          <a:solidFill>
-            <a:schemeClr val="tx1">
-              <a:alpha val="18000"/>
-            </a:schemeClr>
-          </a:solidFill>
-          <a:ln>
-            <a:noFill/>
-          </a:ln>
-          <a:effectLst>
-            <a:outerShdw blurRad="228600" dist="38100" dir="5400000" algn="t" rotWithShape="0">
-              <a:prstClr val="black">
-                <a:alpha val="40000"/>
-              </a:prstClr>
-            </a:outerShdw>
-          </a:effectLst>
-        </p:spPr>
-        <p:style>
-          <a:lnRef idx="2">
-            <a:schemeClr val="accent1">
-              <a:shade val="50000"/>
-            </a:schemeClr>
-          </a:lnRef>
-          <a:fillRef idx="1">
-            <a:schemeClr val="accent1"/>
-          </a:fillRef>
-          <a:effectRef idx="0">
-            <a:schemeClr val="accent1"/>
-          </a:effectRef>
-          <a:fontRef idx="minor">
-            <a:schemeClr val="lt1"/>
-          </a:fontRef>
-        </p:style>
-        <p:txBody>
-          <a:bodyPr rtlCol="0" anchor="ctr"/>
-          <a:lstStyle/>
-          <a:p>
-            <a:pPr algn="ctr"/>
-            <a:endParaRPr lang="ko-KR" altLang="en-US" dirty="0">
-              <a:solidFill>
-                <a:prstClr val="white"/>
-              </a:solidFill>
-            </a:endParaRPr>
-          </a:p>
-        </p:txBody>
-      </p:sp>
-      <p:grpSp>
-        <p:nvGrpSpPr>
-          <p:cNvPr id="70" name="그룹 69">
-            <a:extLst>
-              <a:ext uri="{FF2B5EF4-FFF2-40B4-BE49-F238E27FC236}">
-                <a16:creationId xmlns:a16="http://schemas.microsoft.com/office/drawing/2014/main" id="{0EB63F53-B4C9-3211-E51A-F2C48E3933B4}"/>
-              </a:ext>
-            </a:extLst>
-          </p:cNvPr>
-          <p:cNvGrpSpPr/>
-          <p:nvPr/>
-        </p:nvGrpSpPr>
-        <p:grpSpPr>
-          <a:xfrm>
-            <a:off x="4278607" y="1620438"/>
-            <a:ext cx="337549" cy="373271"/>
-            <a:chOff x="829310" y="702129"/>
-            <a:chExt cx="828040" cy="791936"/>
-          </a:xfrm>
-        </p:grpSpPr>
-        <p:sp>
-          <p:nvSpPr>
-            <p:cNvPr id="71" name="모서리가 둥근 직사각형 4">
-              <a:extLst>
-                <a:ext uri="{FF2B5EF4-FFF2-40B4-BE49-F238E27FC236}">
-                  <a16:creationId xmlns:a16="http://schemas.microsoft.com/office/drawing/2014/main" id="{8F60EC01-71DF-49CD-6CA4-00A9C1E08F7B}"/>
-                </a:ext>
-              </a:extLst>
-            </p:cNvPr>
-            <p:cNvSpPr/>
-            <p:nvPr/>
-          </p:nvSpPr>
-          <p:spPr>
-            <a:xfrm>
-              <a:off x="840921" y="702129"/>
-              <a:ext cx="816429" cy="791936"/>
-            </a:xfrm>
-            <a:prstGeom prst="rect">
-              <a:avLst/>
-            </a:prstGeom>
-            <a:ln/>
-          </p:spPr>
-          <p:style>
-            <a:lnRef idx="2">
-              <a:schemeClr val="accent2"/>
-            </a:lnRef>
-            <a:fillRef idx="1">
-              <a:schemeClr val="lt1"/>
-            </a:fillRef>
-            <a:effectRef idx="0">
-              <a:schemeClr val="accent2"/>
-            </a:effectRef>
-            <a:fontRef idx="minor">
-              <a:schemeClr val="dk1"/>
-            </a:fontRef>
-          </p:style>
-          <p:txBody>
-            <a:bodyPr rtlCol="0" anchor="ctr"/>
-            <a:lstStyle/>
-            <a:p>
-              <a:pPr algn="ctr"/>
-              <a:endParaRPr lang="ko-KR" altLang="en-US">
-                <a:solidFill>
-                  <a:prstClr val="white"/>
-                </a:solidFill>
-              </a:endParaRPr>
-            </a:p>
-          </p:txBody>
-        </p:sp>
-        <p:cxnSp>
-          <p:nvCxnSpPr>
-            <p:cNvPr id="72" name="직선 연결선 71">
-              <a:extLst>
-                <a:ext uri="{FF2B5EF4-FFF2-40B4-BE49-F238E27FC236}">
-                  <a16:creationId xmlns:a16="http://schemas.microsoft.com/office/drawing/2014/main" id="{61D0EFB3-D6D8-A4B4-AE53-0E89CFD800A4}"/>
-                </a:ext>
-              </a:extLst>
-            </p:cNvPr>
-            <p:cNvCxnSpPr/>
-            <p:nvPr/>
-          </p:nvCxnSpPr>
-          <p:spPr>
-            <a:xfrm flipV="1">
-              <a:off x="829310" y="732470"/>
-              <a:ext cx="828040" cy="761595"/>
-            </a:xfrm>
-            <a:prstGeom prst="line">
-              <a:avLst/>
-            </a:prstGeom>
-          </p:spPr>
-          <p:style>
-            <a:lnRef idx="2">
-              <a:schemeClr val="accent2"/>
-            </a:lnRef>
-            <a:fillRef idx="1">
-              <a:schemeClr val="lt1"/>
-            </a:fillRef>
-            <a:effectRef idx="0">
-              <a:schemeClr val="accent2"/>
-            </a:effectRef>
-            <a:fontRef idx="minor">
-              <a:schemeClr val="dk1"/>
-            </a:fontRef>
-          </p:style>
-        </p:cxnSp>
-        <p:cxnSp>
-          <p:nvCxnSpPr>
-            <p:cNvPr id="73" name="직선 연결선 72">
-              <a:extLst>
-                <a:ext uri="{FF2B5EF4-FFF2-40B4-BE49-F238E27FC236}">
-                  <a16:creationId xmlns:a16="http://schemas.microsoft.com/office/drawing/2014/main" id="{DF4C3B2F-9C1D-36AB-DE80-902C076C4AD6}"/>
-                </a:ext>
-              </a:extLst>
-            </p:cNvPr>
-            <p:cNvCxnSpPr/>
-            <p:nvPr/>
-          </p:nvCxnSpPr>
-          <p:spPr>
-            <a:xfrm>
-              <a:off x="829310" y="702129"/>
-              <a:ext cx="828040" cy="788973"/>
-            </a:xfrm>
-            <a:prstGeom prst="line">
-              <a:avLst/>
-            </a:prstGeom>
-          </p:spPr>
-          <p:style>
-            <a:lnRef idx="2">
-              <a:schemeClr val="accent2"/>
-            </a:lnRef>
-            <a:fillRef idx="1">
-              <a:schemeClr val="lt1"/>
-            </a:fillRef>
-            <a:effectRef idx="0">
-              <a:schemeClr val="accent2"/>
-            </a:effectRef>
-            <a:fontRef idx="minor">
-              <a:schemeClr val="dk1"/>
-            </a:fontRef>
-          </p:style>
-        </p:cxnSp>
-      </p:grpSp>
-      <p:sp>
-        <p:nvSpPr>
-          <p:cNvPr id="5" name="모서리가 둥근 직사각형 4">
-            <a:extLst>
-              <a:ext uri="{FF2B5EF4-FFF2-40B4-BE49-F238E27FC236}">
-                <a16:creationId xmlns:a16="http://schemas.microsoft.com/office/drawing/2014/main" id="{D1A7605B-342A-02D1-2FB5-4827A7D3A256}"/>
-              </a:ext>
-            </a:extLst>
-          </p:cNvPr>
-          <p:cNvSpPr/>
-          <p:nvPr/>
-        </p:nvSpPr>
-        <p:spPr>
-          <a:xfrm>
-            <a:off x="775196" y="2006612"/>
-            <a:ext cx="3840960" cy="4214573"/>
-          </a:xfrm>
-          <a:prstGeom prst="rect">
-            <a:avLst/>
-          </a:prstGeom>
-          <a:solidFill>
-            <a:schemeClr val="tx1">
-              <a:alpha val="18000"/>
-            </a:schemeClr>
-          </a:solidFill>
-          <a:ln>
-            <a:noFill/>
-          </a:ln>
-          <a:effectLst>
-            <a:outerShdw blurRad="228600" dist="38100" dir="5400000" algn="t" rotWithShape="0">
-              <a:prstClr val="black">
-                <a:alpha val="40000"/>
-              </a:prstClr>
-            </a:outerShdw>
-          </a:effectLst>
-        </p:spPr>
-        <p:style>
-          <a:lnRef idx="2">
-            <a:schemeClr val="accent1">
-              <a:shade val="50000"/>
-            </a:schemeClr>
-          </a:lnRef>
-          <a:fillRef idx="1">
-            <a:schemeClr val="accent1"/>
-          </a:fillRef>
-          <a:effectRef idx="0">
-            <a:schemeClr val="accent1"/>
-          </a:effectRef>
-          <a:fontRef idx="minor">
-            <a:schemeClr val="lt1"/>
-          </a:fontRef>
-        </p:style>
-        <p:txBody>
-          <a:bodyPr rtlCol="0" anchor="ctr"/>
-          <a:lstStyle/>
-          <a:p>
-            <a:pPr algn="ctr"/>
-            <a:endParaRPr lang="ko-KR" altLang="en-US" dirty="0">
-              <a:solidFill>
-                <a:prstClr val="white"/>
-              </a:solidFill>
-            </a:endParaRPr>
-          </a:p>
-        </p:txBody>
-      </p:sp>
-      <p:sp>
-        <p:nvSpPr>
-          <p:cNvPr id="11" name="모서리가 둥근 직사각형 4">
-            <a:extLst>
-              <a:ext uri="{FF2B5EF4-FFF2-40B4-BE49-F238E27FC236}">
-                <a16:creationId xmlns:a16="http://schemas.microsoft.com/office/drawing/2014/main" id="{F364C913-7CA1-C469-6931-E14797FFD06C}"/>
-              </a:ext>
-            </a:extLst>
-          </p:cNvPr>
-          <p:cNvSpPr/>
-          <p:nvPr/>
-        </p:nvSpPr>
-        <p:spPr>
-          <a:xfrm>
-            <a:off x="909113" y="5237562"/>
-            <a:ext cx="3538268" cy="797378"/>
-          </a:xfrm>
-          <a:prstGeom prst="rect">
-            <a:avLst/>
-          </a:prstGeom>
-          <a:solidFill>
-            <a:schemeClr val="tx1">
-              <a:alpha val="18000"/>
-            </a:schemeClr>
-          </a:solidFill>
-          <a:ln>
-            <a:noFill/>
-          </a:ln>
-          <a:effectLst>
-            <a:outerShdw blurRad="228600" dist="38100" dir="5400000" algn="t" rotWithShape="0">
-              <a:prstClr val="black">
-                <a:alpha val="40000"/>
-              </a:prstClr>
-            </a:outerShdw>
-          </a:effectLst>
-        </p:spPr>
-        <p:style>
-          <a:lnRef idx="2">
-            <a:schemeClr val="accent1">
-              <a:shade val="50000"/>
-            </a:schemeClr>
-          </a:lnRef>
-          <a:fillRef idx="1">
-            <a:schemeClr val="accent1"/>
-          </a:fillRef>
-          <a:effectRef idx="0">
-            <a:schemeClr val="accent1"/>
-          </a:effectRef>
-          <a:fontRef idx="minor">
-            <a:schemeClr val="lt1"/>
-          </a:fontRef>
-        </p:style>
-        <p:txBody>
-          <a:bodyPr rtlCol="0" anchor="ctr"/>
-          <a:lstStyle/>
-          <a:p>
-            <a:pPr algn="ctr"/>
-            <a:r>
-              <a:rPr lang="ko-KR" altLang="en-US">
-                <a:solidFill>
-                  <a:prstClr val="white"/>
-                </a:solidFill>
-              </a:rPr>
-              <a:t>회원가입</a:t>
-            </a:r>
-            <a:endParaRPr lang="ko-KR" altLang="en-US" dirty="0">
-              <a:solidFill>
-                <a:prstClr val="white"/>
-              </a:solidFill>
-            </a:endParaRPr>
-          </a:p>
-        </p:txBody>
-      </p:sp>
-      <p:sp>
-        <p:nvSpPr>
-          <p:cNvPr id="14" name="모서리가 둥근 직사각형 4">
-            <a:extLst>
-              <a:ext uri="{FF2B5EF4-FFF2-40B4-BE49-F238E27FC236}">
-                <a16:creationId xmlns:a16="http://schemas.microsoft.com/office/drawing/2014/main" id="{0197A3F5-1D72-CFF3-190A-AEE5FADC655D}"/>
-              </a:ext>
-            </a:extLst>
-          </p:cNvPr>
-          <p:cNvSpPr/>
-          <p:nvPr/>
-        </p:nvSpPr>
-        <p:spPr>
-          <a:xfrm>
-            <a:off x="7369218" y="1619040"/>
-            <a:ext cx="3840960" cy="4602145"/>
-          </a:xfrm>
-          <a:prstGeom prst="rect">
-            <a:avLst/>
-          </a:prstGeom>
-          <a:solidFill>
-            <a:schemeClr val="tx1">
-              <a:alpha val="18000"/>
-            </a:schemeClr>
-          </a:solidFill>
-          <a:ln>
-            <a:noFill/>
-          </a:ln>
-          <a:effectLst>
-            <a:outerShdw blurRad="228600" dist="38100" dir="5400000" algn="t" rotWithShape="0">
-              <a:prstClr val="black">
-                <a:alpha val="40000"/>
-              </a:prstClr>
-            </a:outerShdw>
-          </a:effectLst>
-        </p:spPr>
-        <p:style>
-          <a:lnRef idx="2">
-            <a:schemeClr val="accent1">
-              <a:shade val="50000"/>
-            </a:schemeClr>
-          </a:lnRef>
-          <a:fillRef idx="1">
-            <a:schemeClr val="accent1"/>
-          </a:fillRef>
-          <a:effectRef idx="0">
-            <a:schemeClr val="accent1"/>
-          </a:effectRef>
-          <a:fontRef idx="minor">
-            <a:schemeClr val="lt1"/>
-          </a:fontRef>
-        </p:style>
-        <p:txBody>
-          <a:bodyPr rtlCol="0" anchor="ctr"/>
-          <a:lstStyle/>
-          <a:p>
-            <a:pPr algn="ctr"/>
-            <a:endParaRPr lang="ko-KR" altLang="en-US" dirty="0">
-              <a:solidFill>
-                <a:prstClr val="white"/>
-              </a:solidFill>
-            </a:endParaRPr>
-          </a:p>
-        </p:txBody>
-      </p:sp>
-      <p:grpSp>
-        <p:nvGrpSpPr>
-          <p:cNvPr id="15" name="그룹 14">
-            <a:extLst>
-              <a:ext uri="{FF2B5EF4-FFF2-40B4-BE49-F238E27FC236}">
-                <a16:creationId xmlns:a16="http://schemas.microsoft.com/office/drawing/2014/main" id="{6E9959E2-028C-012F-9055-D44AFB2E6651}"/>
-              </a:ext>
-            </a:extLst>
-          </p:cNvPr>
-          <p:cNvGrpSpPr/>
-          <p:nvPr/>
-        </p:nvGrpSpPr>
-        <p:grpSpPr>
-          <a:xfrm>
-            <a:off x="10872629" y="1620437"/>
-            <a:ext cx="337549" cy="373271"/>
-            <a:chOff x="829310" y="702129"/>
-            <a:chExt cx="828040" cy="791936"/>
-          </a:xfrm>
-        </p:grpSpPr>
-        <p:sp>
-          <p:nvSpPr>
-            <p:cNvPr id="16" name="모서리가 둥근 직사각형 4">
-              <a:extLst>
-                <a:ext uri="{FF2B5EF4-FFF2-40B4-BE49-F238E27FC236}">
-                  <a16:creationId xmlns:a16="http://schemas.microsoft.com/office/drawing/2014/main" id="{CAA01113-0558-6874-2D90-56CBAF9EDDA2}"/>
-                </a:ext>
-              </a:extLst>
-            </p:cNvPr>
-            <p:cNvSpPr/>
-            <p:nvPr/>
-          </p:nvSpPr>
-          <p:spPr>
-            <a:xfrm>
-              <a:off x="840921" y="702129"/>
-              <a:ext cx="816429" cy="791936"/>
-            </a:xfrm>
-            <a:prstGeom prst="rect">
-              <a:avLst/>
-            </a:prstGeom>
-            <a:ln/>
-          </p:spPr>
-          <p:style>
-            <a:lnRef idx="2">
-              <a:schemeClr val="accent2"/>
-            </a:lnRef>
-            <a:fillRef idx="1">
-              <a:schemeClr val="lt1"/>
-            </a:fillRef>
-            <a:effectRef idx="0">
-              <a:schemeClr val="accent2"/>
-            </a:effectRef>
-            <a:fontRef idx="minor">
-              <a:schemeClr val="dk1"/>
-            </a:fontRef>
-          </p:style>
-          <p:txBody>
-            <a:bodyPr rtlCol="0" anchor="ctr"/>
-            <a:lstStyle/>
-            <a:p>
-              <a:pPr algn="ctr"/>
-              <a:endParaRPr lang="ko-KR" altLang="en-US">
-                <a:solidFill>
-                  <a:prstClr val="white"/>
-                </a:solidFill>
-              </a:endParaRPr>
-            </a:p>
-          </p:txBody>
-        </p:sp>
-        <p:cxnSp>
-          <p:nvCxnSpPr>
-            <p:cNvPr id="17" name="직선 연결선 16">
-              <a:extLst>
-                <a:ext uri="{FF2B5EF4-FFF2-40B4-BE49-F238E27FC236}">
-                  <a16:creationId xmlns:a16="http://schemas.microsoft.com/office/drawing/2014/main" id="{2F0F3E2F-C23E-415D-C1B4-BE0BBAA3AB0D}"/>
-                </a:ext>
-              </a:extLst>
-            </p:cNvPr>
-            <p:cNvCxnSpPr/>
-            <p:nvPr/>
-          </p:nvCxnSpPr>
-          <p:spPr>
-            <a:xfrm flipV="1">
-              <a:off x="829310" y="732470"/>
-              <a:ext cx="828040" cy="761595"/>
-            </a:xfrm>
-            <a:prstGeom prst="line">
-              <a:avLst/>
-            </a:prstGeom>
-          </p:spPr>
-          <p:style>
-            <a:lnRef idx="2">
-              <a:schemeClr val="accent2"/>
-            </a:lnRef>
-            <a:fillRef idx="1">
-              <a:schemeClr val="lt1"/>
-            </a:fillRef>
-            <a:effectRef idx="0">
-              <a:schemeClr val="accent2"/>
-            </a:effectRef>
-            <a:fontRef idx="minor">
-              <a:schemeClr val="dk1"/>
-            </a:fontRef>
-          </p:style>
-        </p:cxnSp>
-        <p:cxnSp>
-          <p:nvCxnSpPr>
-            <p:cNvPr id="18" name="직선 연결선 17">
-              <a:extLst>
-                <a:ext uri="{FF2B5EF4-FFF2-40B4-BE49-F238E27FC236}">
-                  <a16:creationId xmlns:a16="http://schemas.microsoft.com/office/drawing/2014/main" id="{D6C80B40-979E-230B-C0D7-B1937D4E163E}"/>
-                </a:ext>
-              </a:extLst>
-            </p:cNvPr>
-            <p:cNvCxnSpPr/>
-            <p:nvPr/>
-          </p:nvCxnSpPr>
-          <p:spPr>
-            <a:xfrm>
-              <a:off x="829310" y="702129"/>
-              <a:ext cx="828040" cy="788973"/>
-            </a:xfrm>
-            <a:prstGeom prst="line">
-              <a:avLst/>
-            </a:prstGeom>
-          </p:spPr>
-          <p:style>
-            <a:lnRef idx="2">
-              <a:schemeClr val="accent2"/>
-            </a:lnRef>
-            <a:fillRef idx="1">
-              <a:schemeClr val="lt1"/>
-            </a:fillRef>
-            <a:effectRef idx="0">
-              <a:schemeClr val="accent2"/>
-            </a:effectRef>
-            <a:fontRef idx="minor">
-              <a:schemeClr val="dk1"/>
-            </a:fontRef>
-          </p:style>
-        </p:cxnSp>
-      </p:grpSp>
-      <p:sp>
-        <p:nvSpPr>
-          <p:cNvPr id="20" name="모서리가 둥근 직사각형 4">
-            <a:extLst>
-              <a:ext uri="{FF2B5EF4-FFF2-40B4-BE49-F238E27FC236}">
-                <a16:creationId xmlns:a16="http://schemas.microsoft.com/office/drawing/2014/main" id="{6CB7F6B3-81EC-1A90-0AC7-71AA5FF9F7A4}"/>
-              </a:ext>
-            </a:extLst>
-          </p:cNvPr>
-          <p:cNvSpPr/>
-          <p:nvPr/>
-        </p:nvSpPr>
-        <p:spPr>
-          <a:xfrm>
-            <a:off x="7364512" y="2006612"/>
-            <a:ext cx="3840960" cy="4214573"/>
-          </a:xfrm>
-          <a:prstGeom prst="rect">
-            <a:avLst/>
-          </a:prstGeom>
-          <a:solidFill>
-            <a:schemeClr val="tx1">
-              <a:alpha val="18000"/>
-            </a:schemeClr>
-          </a:solidFill>
-          <a:ln>
-            <a:noFill/>
-          </a:ln>
-          <a:effectLst>
-            <a:outerShdw blurRad="228600" dist="38100" dir="5400000" algn="t" rotWithShape="0">
-              <a:prstClr val="black">
-                <a:alpha val="40000"/>
-              </a:prstClr>
-            </a:outerShdw>
-          </a:effectLst>
-        </p:spPr>
-        <p:style>
-          <a:lnRef idx="2">
-            <a:schemeClr val="accent1">
-              <a:shade val="50000"/>
-            </a:schemeClr>
-          </a:lnRef>
-          <a:fillRef idx="1">
-            <a:schemeClr val="accent1"/>
-          </a:fillRef>
-          <a:effectRef idx="0">
-            <a:schemeClr val="accent1"/>
-          </a:effectRef>
-          <a:fontRef idx="minor">
-            <a:schemeClr val="lt1"/>
-          </a:fontRef>
-        </p:style>
-        <p:txBody>
-          <a:bodyPr rtlCol="0" anchor="ctr"/>
-          <a:lstStyle/>
-          <a:p>
-            <a:pPr algn="ctr"/>
-            <a:endParaRPr lang="ko-KR" altLang="en-US" dirty="0">
-              <a:solidFill>
-                <a:prstClr val="white"/>
-              </a:solidFill>
-            </a:endParaRPr>
-          </a:p>
-        </p:txBody>
-      </p:sp>
-      <p:sp>
-        <p:nvSpPr>
-          <p:cNvPr id="21" name="모서리가 둥근 직사각형 4">
-            <a:extLst>
-              <a:ext uri="{FF2B5EF4-FFF2-40B4-BE49-F238E27FC236}">
-                <a16:creationId xmlns:a16="http://schemas.microsoft.com/office/drawing/2014/main" id="{DF4A21D8-38DB-2B2A-B5BC-A9DC377B7480}"/>
-              </a:ext>
-            </a:extLst>
-          </p:cNvPr>
-          <p:cNvSpPr/>
-          <p:nvPr/>
-        </p:nvSpPr>
-        <p:spPr>
-          <a:xfrm>
-            <a:off x="7515858" y="2155252"/>
-            <a:ext cx="3538268" cy="2881379"/>
-          </a:xfrm>
-          <a:prstGeom prst="rect">
-            <a:avLst/>
-          </a:prstGeom>
-          <a:solidFill>
-            <a:schemeClr val="tx1">
-              <a:alpha val="18000"/>
-            </a:schemeClr>
-          </a:solidFill>
-          <a:ln>
-            <a:noFill/>
-          </a:ln>
-          <a:effectLst>
-            <a:outerShdw blurRad="228600" dist="38100" dir="5400000" algn="t" rotWithShape="0">
-              <a:prstClr val="black">
-                <a:alpha val="40000"/>
-              </a:prstClr>
-            </a:outerShdw>
-          </a:effectLst>
-        </p:spPr>
-        <p:style>
-          <a:lnRef idx="2">
-            <a:schemeClr val="accent1">
-              <a:shade val="50000"/>
-            </a:schemeClr>
-          </a:lnRef>
-          <a:fillRef idx="1">
-            <a:schemeClr val="accent1"/>
-          </a:fillRef>
-          <a:effectRef idx="0">
-            <a:schemeClr val="accent1"/>
-          </a:effectRef>
-          <a:fontRef idx="minor">
-            <a:schemeClr val="lt1"/>
-          </a:fontRef>
-        </p:style>
-        <p:txBody>
-          <a:bodyPr rtlCol="0" anchor="ctr"/>
-          <a:lstStyle/>
-          <a:p>
-            <a:pPr algn="ctr"/>
-            <a:r>
-              <a:rPr lang="ko-KR" altLang="en-US" dirty="0">
-                <a:solidFill>
-                  <a:prstClr val="white"/>
-                </a:solidFill>
-              </a:rPr>
-              <a:t>프로필 정보</a:t>
-            </a:r>
-          </a:p>
-        </p:txBody>
-      </p:sp>
-      <p:sp>
-        <p:nvSpPr>
-          <p:cNvPr id="22" name="모서리가 둥근 직사각형 4">
-            <a:extLst>
-              <a:ext uri="{FF2B5EF4-FFF2-40B4-BE49-F238E27FC236}">
-                <a16:creationId xmlns:a16="http://schemas.microsoft.com/office/drawing/2014/main" id="{CDF75EEA-060C-3CED-961F-4A01EE0E1749}"/>
-              </a:ext>
-            </a:extLst>
-          </p:cNvPr>
-          <p:cNvSpPr/>
-          <p:nvPr/>
-        </p:nvSpPr>
-        <p:spPr>
-          <a:xfrm>
-            <a:off x="7515858" y="5206243"/>
-            <a:ext cx="3538268" cy="828697"/>
-          </a:xfrm>
-          <a:prstGeom prst="rect">
-            <a:avLst/>
-          </a:prstGeom>
-          <a:solidFill>
-            <a:schemeClr val="tx1">
-              <a:alpha val="18000"/>
-            </a:schemeClr>
-          </a:solidFill>
-          <a:ln>
-            <a:noFill/>
-          </a:ln>
-          <a:effectLst>
-            <a:outerShdw blurRad="228600" dist="38100" dir="5400000" algn="t" rotWithShape="0">
-              <a:prstClr val="black">
-                <a:alpha val="40000"/>
-              </a:prstClr>
-            </a:outerShdw>
-          </a:effectLst>
-        </p:spPr>
-        <p:style>
-          <a:lnRef idx="2">
-            <a:schemeClr val="accent1">
-              <a:shade val="50000"/>
-            </a:schemeClr>
-          </a:lnRef>
-          <a:fillRef idx="1">
-            <a:schemeClr val="accent1"/>
-          </a:fillRef>
-          <a:effectRef idx="0">
-            <a:schemeClr val="accent1"/>
-          </a:effectRef>
-          <a:fontRef idx="minor">
-            <a:schemeClr val="lt1"/>
-          </a:fontRef>
-        </p:style>
-        <p:txBody>
-          <a:bodyPr rtlCol="0" anchor="ctr"/>
-          <a:lstStyle/>
-          <a:p>
-            <a:pPr algn="ctr"/>
-            <a:r>
-              <a:rPr lang="ko-KR" altLang="en-US" dirty="0">
-                <a:solidFill>
-                  <a:prstClr val="white"/>
-                </a:solidFill>
-              </a:rPr>
-              <a:t>로그아웃</a:t>
-            </a:r>
-          </a:p>
-        </p:txBody>
-      </p:sp>
-      <p:sp>
-        <p:nvSpPr>
-          <p:cNvPr id="12" name="직사각형 11">
-            <a:extLst>
-              <a:ext uri="{FF2B5EF4-FFF2-40B4-BE49-F238E27FC236}">
-                <a16:creationId xmlns:a16="http://schemas.microsoft.com/office/drawing/2014/main" id="{1631CBEE-07CA-B575-7F59-3F923612DE15}"/>
-              </a:ext>
-            </a:extLst>
-          </p:cNvPr>
-          <p:cNvSpPr/>
-          <p:nvPr/>
-        </p:nvSpPr>
-        <p:spPr>
-          <a:xfrm>
-            <a:off x="1137873" y="2548571"/>
-            <a:ext cx="3066733" cy="457200"/>
-          </a:xfrm>
-          <a:prstGeom prst="rect">
-            <a:avLst/>
-          </a:prstGeom>
-        </p:spPr>
-        <p:style>
-          <a:lnRef idx="2">
-            <a:schemeClr val="accent1">
-              <a:shade val="15000"/>
-            </a:schemeClr>
-          </a:lnRef>
-          <a:fillRef idx="1">
-            <a:schemeClr val="accent1"/>
-          </a:fillRef>
-          <a:effectRef idx="0">
-            <a:schemeClr val="accent1"/>
-          </a:effectRef>
-          <a:fontRef idx="minor">
-            <a:schemeClr val="lt1"/>
-          </a:fontRef>
-        </p:style>
-        <p:txBody>
-          <a:bodyPr rtlCol="0" anchor="ctr"/>
-          <a:lstStyle/>
-          <a:p>
-            <a:pPr algn="ctr"/>
-            <a:r>
-              <a:rPr lang="en-US" altLang="ko-KR" dirty="0"/>
-              <a:t>ID</a:t>
-            </a:r>
-            <a:endParaRPr lang="ko-KR" altLang="en-US" dirty="0"/>
-          </a:p>
-        </p:txBody>
-      </p:sp>
-      <p:sp>
-        <p:nvSpPr>
-          <p:cNvPr id="13" name="직사각형 12">
-            <a:extLst>
-              <a:ext uri="{FF2B5EF4-FFF2-40B4-BE49-F238E27FC236}">
-                <a16:creationId xmlns:a16="http://schemas.microsoft.com/office/drawing/2014/main" id="{BEC73D13-207D-970F-F57C-9F791A0BAF7E}"/>
-              </a:ext>
-            </a:extLst>
-          </p:cNvPr>
-          <p:cNvSpPr/>
-          <p:nvPr/>
-        </p:nvSpPr>
-        <p:spPr>
-          <a:xfrm>
-            <a:off x="1137872" y="3138741"/>
-            <a:ext cx="3066733" cy="457200"/>
-          </a:xfrm>
-          <a:prstGeom prst="rect">
-            <a:avLst/>
-          </a:prstGeom>
-        </p:spPr>
-        <p:style>
-          <a:lnRef idx="2">
-            <a:schemeClr val="accent1">
-              <a:shade val="15000"/>
-            </a:schemeClr>
-          </a:lnRef>
-          <a:fillRef idx="1">
-            <a:schemeClr val="accent1"/>
-          </a:fillRef>
-          <a:effectRef idx="0">
-            <a:schemeClr val="accent1"/>
-          </a:effectRef>
-          <a:fontRef idx="minor">
-            <a:schemeClr val="lt1"/>
-          </a:fontRef>
-        </p:style>
-        <p:txBody>
-          <a:bodyPr rtlCol="0" anchor="ctr"/>
-          <a:lstStyle/>
-          <a:p>
-            <a:pPr algn="ctr"/>
-            <a:r>
-              <a:rPr lang="en-US" altLang="ko-KR"/>
-              <a:t>PW</a:t>
-            </a:r>
-            <a:endParaRPr lang="ko-KR" altLang="en-US" dirty="0"/>
-          </a:p>
-        </p:txBody>
-      </p:sp>
-      <p:sp>
-        <p:nvSpPr>
-          <p:cNvPr id="19" name="직사각형 18">
-            <a:extLst>
-              <a:ext uri="{FF2B5EF4-FFF2-40B4-BE49-F238E27FC236}">
-                <a16:creationId xmlns:a16="http://schemas.microsoft.com/office/drawing/2014/main" id="{23ABFB8F-9322-688D-F699-0D9DE7BE639D}"/>
-              </a:ext>
-            </a:extLst>
-          </p:cNvPr>
-          <p:cNvSpPr/>
-          <p:nvPr/>
-        </p:nvSpPr>
-        <p:spPr>
-          <a:xfrm>
-            <a:off x="1137871" y="4453944"/>
-            <a:ext cx="3066733" cy="457200"/>
-          </a:xfrm>
-          <a:prstGeom prst="rect">
-            <a:avLst/>
-          </a:prstGeom>
-        </p:spPr>
-        <p:style>
-          <a:lnRef idx="2">
-            <a:schemeClr val="accent1">
-              <a:shade val="15000"/>
-            </a:schemeClr>
-          </a:lnRef>
-          <a:fillRef idx="1">
-            <a:schemeClr val="accent1"/>
-          </a:fillRef>
-          <a:effectRef idx="0">
-            <a:schemeClr val="accent1"/>
-          </a:effectRef>
-          <a:fontRef idx="minor">
-            <a:schemeClr val="lt1"/>
-          </a:fontRef>
-        </p:style>
-        <p:txBody>
-          <a:bodyPr rtlCol="0" anchor="ctr"/>
-          <a:lstStyle/>
-          <a:p>
-            <a:pPr algn="ctr"/>
-            <a:r>
-              <a:rPr lang="en-US" altLang="ko-KR" dirty="0"/>
-              <a:t>Login</a:t>
-            </a:r>
-            <a:endParaRPr lang="ko-KR" altLang="en-US" dirty="0"/>
-          </a:p>
-        </p:txBody>
-      </p:sp>
-    </p:spTree>
-    <p:extLst>
-      <p:ext uri="{BB962C8B-B14F-4D97-AF65-F5344CB8AC3E}">
-        <p14:creationId xmlns:p14="http://schemas.microsoft.com/office/powerpoint/2010/main" val="1194596477"/>
-      </p:ext>
-    </p:extLst>
-  </p:cSld>
-  <p:clrMapOvr>
-    <a:masterClrMapping/>
-  </p:clrMapOvr>
-</p:sld>
-</file>
-
-<file path=ppt/slides/slide6.xml><?xml version="1.0" encoding="utf-8"?>
-<p:sld xmlns:a="http://schemas.openxmlformats.org/drawingml/2006/main" xmlns:r="http://schemas.openxmlformats.org/officeDocument/2006/relationships" xmlns:p="http://schemas.openxmlformats.org/presentationml/2006/main">
-  <p:cSld>
-    <p:spTree>
-      <p:nvGrpSpPr>
-        <p:cNvPr id="1" name=""/>
-        <p:cNvGrpSpPr/>
-        <p:nvPr/>
-      </p:nvGrpSpPr>
-      <p:grpSpPr>
-        <a:xfrm>
-          <a:off x="0" y="0"/>
-          <a:ext cx="0" cy="0"/>
-          <a:chOff x="0" y="0"/>
-          <a:chExt cx="0" cy="0"/>
-        </a:xfrm>
-      </p:grpSpPr>
-      <p:grpSp>
-        <p:nvGrpSpPr>
-          <p:cNvPr id="3" name="그룹 2"/>
-          <p:cNvGrpSpPr/>
-          <p:nvPr/>
-        </p:nvGrpSpPr>
-        <p:grpSpPr>
-          <a:xfrm>
-            <a:off x="6929" y="-204107"/>
-            <a:ext cx="12178141" cy="6858000"/>
-            <a:chOff x="13858" y="0"/>
-            <a:chExt cx="12178141" cy="6858000"/>
-          </a:xfrm>
-        </p:grpSpPr>
-        <p:sp>
-          <p:nvSpPr>
-            <p:cNvPr id="7" name="모서리가 둥근 직사각형 4">
-              <a:extLst>
-                <a:ext uri="{FF2B5EF4-FFF2-40B4-BE49-F238E27FC236}">
-                  <a16:creationId xmlns:a16="http://schemas.microsoft.com/office/drawing/2014/main" id="{313104EB-6B40-EAB0-156C-047965625EAB}"/>
-                </a:ext>
-              </a:extLst>
-            </p:cNvPr>
-            <p:cNvSpPr/>
-            <p:nvPr/>
-          </p:nvSpPr>
-          <p:spPr>
-            <a:xfrm>
-              <a:off x="13858" y="0"/>
-              <a:ext cx="12178141" cy="6858000"/>
-            </a:xfrm>
-            <a:prstGeom prst="roundRect">
-              <a:avLst>
-                <a:gd name="adj" fmla="val 3484"/>
-              </a:avLst>
-            </a:prstGeom>
-            <a:solidFill>
-              <a:srgbClr val="646C79"/>
-            </a:solidFill>
-            <a:ln>
-              <a:noFill/>
-            </a:ln>
-            <a:effectLst>
-              <a:outerShdw blurRad="228600" dist="38100" dir="5400000" algn="t" rotWithShape="0">
-                <a:prstClr val="black">
-                  <a:alpha val="40000"/>
-                </a:prstClr>
-              </a:outerShdw>
-            </a:effectLst>
-          </p:spPr>
-          <p:style>
-            <a:lnRef idx="2">
-              <a:schemeClr val="accent1">
-                <a:shade val="50000"/>
-              </a:schemeClr>
-            </a:lnRef>
-            <a:fillRef idx="1">
-              <a:schemeClr val="accent1"/>
-            </a:fillRef>
-            <a:effectRef idx="0">
-              <a:schemeClr val="accent1"/>
-            </a:effectRef>
-            <a:fontRef idx="minor">
-              <a:schemeClr val="lt1"/>
-            </a:fontRef>
-          </p:style>
-          <p:txBody>
-            <a:bodyPr rtlCol="0" anchor="ctr"/>
-            <a:lstStyle/>
-            <a:p>
-              <a:pPr algn="ctr"/>
-              <a:endParaRPr lang="ko-KR" altLang="en-US">
-                <a:solidFill>
-                  <a:prstClr val="white"/>
-                </a:solidFill>
-              </a:endParaRPr>
-            </a:p>
-          </p:txBody>
-        </p:sp>
-        <p:sp>
-          <p:nvSpPr>
-            <p:cNvPr id="8" name="모서리가 둥근 직사각형 5">
-              <a:extLst>
-                <a:ext uri="{FF2B5EF4-FFF2-40B4-BE49-F238E27FC236}">
-                  <a16:creationId xmlns:a16="http://schemas.microsoft.com/office/drawing/2014/main" id="{FE48B50B-F229-12E5-2CEA-0361300EEF8E}"/>
-                </a:ext>
-              </a:extLst>
-            </p:cNvPr>
-            <p:cNvSpPr/>
-            <p:nvPr/>
-          </p:nvSpPr>
-          <p:spPr>
-            <a:xfrm>
-              <a:off x="275080" y="169164"/>
-              <a:ext cx="11916919" cy="6688836"/>
-            </a:xfrm>
-            <a:prstGeom prst="roundRect">
-              <a:avLst>
-                <a:gd name="adj" fmla="val 3446"/>
-              </a:avLst>
-            </a:prstGeom>
-            <a:solidFill>
-              <a:srgbClr val="F2F2F2"/>
-            </a:solidFill>
-            <a:ln>
-              <a:noFill/>
-            </a:ln>
-          </p:spPr>
-          <p:style>
-            <a:lnRef idx="2">
-              <a:schemeClr val="accent1">
-                <a:shade val="50000"/>
-              </a:schemeClr>
-            </a:lnRef>
-            <a:fillRef idx="1">
-              <a:schemeClr val="accent1"/>
-            </a:fillRef>
-            <a:effectRef idx="0">
-              <a:schemeClr val="accent1"/>
-            </a:effectRef>
-            <a:fontRef idx="minor">
-              <a:schemeClr val="lt1"/>
-            </a:fontRef>
-          </p:style>
-          <p:txBody>
-            <a:bodyPr lIns="288000" tIns="252000" rtlCol="0" anchor="t"/>
-            <a:lstStyle/>
-            <a:p>
-              <a:pPr latinLnBrk="0">
-                <a:lnSpc>
-                  <a:spcPct val="150000"/>
-                </a:lnSpc>
-                <a:defRPr/>
-              </a:pPr>
-              <a:endParaRPr lang="ko-KR" altLang="en-US" sz="1600" dirty="0">
-                <a:solidFill>
-                  <a:srgbClr val="646C79"/>
-                </a:solidFill>
-              </a:endParaRPr>
-            </a:p>
-          </p:txBody>
-        </p:sp>
-      </p:grpSp>
-      <p:sp>
-        <p:nvSpPr>
-          <p:cNvPr id="9" name="사각형: 둥근 모서리 8">
-            <a:extLst>
-              <a:ext uri="{FF2B5EF4-FFF2-40B4-BE49-F238E27FC236}">
-                <a16:creationId xmlns:a16="http://schemas.microsoft.com/office/drawing/2014/main" id="{86BCEDDA-BD45-3BF8-BEDE-9C9852DEA195}"/>
-              </a:ext>
-            </a:extLst>
-          </p:cNvPr>
-          <p:cNvSpPr/>
-          <p:nvPr/>
-        </p:nvSpPr>
-        <p:spPr>
-          <a:xfrm>
-            <a:off x="575582" y="164682"/>
-            <a:ext cx="6226302" cy="449580"/>
-          </a:xfrm>
-          <a:prstGeom prst="roundRect">
-            <a:avLst>
-              <a:gd name="adj" fmla="val 50000"/>
-            </a:avLst>
-          </a:prstGeom>
-          <a:solidFill>
-            <a:srgbClr val="FF5050"/>
-          </a:solidFill>
-          <a:ln>
-            <a:noFill/>
-          </a:ln>
-          <a:effectLst>
-            <a:outerShdw blurRad="190500" dist="38100" dir="5400000" algn="t" rotWithShape="0">
-              <a:srgbClr val="489BFB">
-                <a:alpha val="17000"/>
-              </a:srgbClr>
-            </a:outerShdw>
-          </a:effectLst>
-        </p:spPr>
-        <p:style>
-          <a:lnRef idx="2">
-            <a:schemeClr val="accent1">
-              <a:shade val="50000"/>
-            </a:schemeClr>
-          </a:lnRef>
-          <a:fillRef idx="1">
-            <a:schemeClr val="accent1"/>
-          </a:fillRef>
-          <a:effectRef idx="0">
-            <a:schemeClr val="accent1"/>
-          </a:effectRef>
-          <a:fontRef idx="minor">
-            <a:schemeClr val="lt1"/>
-          </a:fontRef>
-        </p:style>
-        <p:txBody>
-          <a:bodyPr rtlCol="0" anchor="ctr"/>
-          <a:lstStyle/>
-          <a:p>
-            <a:pPr marL="180975">
-              <a:tabLst>
-                <a:tab pos="1524000" algn="l"/>
-                <a:tab pos="2419350" algn="l"/>
-              </a:tabLst>
-              <a:defRPr/>
-            </a:pPr>
-            <a:r>
-              <a:rPr lang="ko-KR" altLang="en-US" sz="2000" dirty="0">
-                <a:solidFill>
-                  <a:schemeClr val="bg1"/>
-                </a:solidFill>
-              </a:rPr>
-              <a:t>화면 구성 및 레이아웃 설계 </a:t>
-            </a:r>
-            <a:r>
-              <a:rPr lang="en-US" altLang="ko-KR" sz="700" dirty="0">
-                <a:solidFill>
-                  <a:schemeClr val="bg1"/>
-                </a:solidFill>
-              </a:rPr>
-              <a:t>Price Navi</a:t>
-            </a:r>
-            <a:endParaRPr lang="ko-KR" altLang="en-US" sz="700" dirty="0">
-              <a:solidFill>
-                <a:schemeClr val="bg1"/>
-              </a:solidFill>
-            </a:endParaRPr>
-          </a:p>
-        </p:txBody>
-      </p:sp>
-      <p:sp>
-        <p:nvSpPr>
-          <p:cNvPr id="10" name="직사각형 9">
-            <a:extLst>
-              <a:ext uri="{FF2B5EF4-FFF2-40B4-BE49-F238E27FC236}">
-                <a16:creationId xmlns:a16="http://schemas.microsoft.com/office/drawing/2014/main" id="{A1B01137-666C-5FA9-BB1D-5FFFCAA624FD}"/>
-              </a:ext>
-            </a:extLst>
-          </p:cNvPr>
-          <p:cNvSpPr/>
-          <p:nvPr/>
-        </p:nvSpPr>
-        <p:spPr>
-          <a:xfrm>
             <a:off x="563969" y="709550"/>
             <a:ext cx="11348267" cy="5731328"/>
           </a:xfrm>
@@ -10416,7 +9122,7 @@
 </p:sld>
 </file>
 
-<file path=ppt/slides/slide7.xml><?xml version="1.0" encoding="utf-8"?>
+<file path=ppt/slides/slide6.xml><?xml version="1.0" encoding="utf-8"?>
 <p:sld xmlns:a="http://schemas.openxmlformats.org/drawingml/2006/main" xmlns:r="http://schemas.openxmlformats.org/officeDocument/2006/relationships" xmlns:p="http://schemas.openxmlformats.org/presentationml/2006/main">
   <p:cSld>
     <p:spTree>
@@ -11714,7 +10420,7 @@
 </p:sld>
 </file>
 
-<file path=ppt/slides/slide8.xml><?xml version="1.0" encoding="utf-8"?>
+<file path=ppt/slides/slide7.xml><?xml version="1.0" encoding="utf-8"?>
 <p:sld xmlns:a="http://schemas.openxmlformats.org/drawingml/2006/main" xmlns:r="http://schemas.openxmlformats.org/officeDocument/2006/relationships" xmlns:p="http://schemas.openxmlformats.org/presentationml/2006/main">
   <p:cSld>
     <p:spTree>
@@ -12891,7 +11597,7 @@
 </p:sld>
 </file>
 
-<file path=ppt/slides/slide9.xml><?xml version="1.0" encoding="utf-8"?>
+<file path=ppt/slides/slide8.xml><?xml version="1.0" encoding="utf-8"?>
 <p:sld xmlns:a="http://schemas.openxmlformats.org/drawingml/2006/main" xmlns:r="http://schemas.openxmlformats.org/officeDocument/2006/relationships" xmlns:p="http://schemas.openxmlformats.org/presentationml/2006/main">
   <p:cSld>
     <p:spTree>
